--- a/VisionGuard_Product_Overview.pptx
+++ b/VisionGuard_Product_Overview.pptx
@@ -5,10 +5,10 @@
     <p:sldMasterId id="2147483648" r:id="rId1"/>
   </p:sldMasterIdLst>
   <p:sldIdLst>
-    <p:sldId id="256" r:id="rId7"/>
-    <p:sldId id="257" r:id="rId8"/>
+    <p:sldId id="256" r:id="rId2"/>
+    <p:sldId id="257" r:id="rId3"/>
   </p:sldIdLst>
-  <p:sldSz cx="7560000" cy="10692000" type="screen4x3"/>
+  <p:sldSz cx="7559675" cy="10691813"/>
   <p:notesSz cx="6858000" cy="9144000"/>
   <p:defaultTextStyle>
     <a:defPPr>
@@ -105,6 +105,22 @@
       </a:defRPr>
     </a:lvl9pPr>
   </p:defaultTextStyle>
+  <p:extLst>
+    <p:ext uri="{EFAFB233-063F-42B5-8137-9DF3F51BA10A}">
+      <p15:sldGuideLst xmlns:p15="http://schemas.microsoft.com/office/powerpoint/2012/main">
+        <p15:guide id="1" orient="horz" pos="2160">
+          <p15:clr>
+            <a:srgbClr val="A4A3A4"/>
+          </p15:clr>
+        </p15:guide>
+        <p15:guide id="2" pos="2880">
+          <p15:clr>
+            <a:srgbClr val="A4A3A4"/>
+          </p15:clr>
+        </p15:guide>
+      </p15:sldGuideLst>
+    </p:ext>
+  </p:extLst>
 </p:presentation>
 </file>
 
@@ -146,10 +162,9 @@
           <a:lstStyle/>
           <a:p>
             <a:r>
-              <a:rPr lang="en-US" smtClean="0"/>
+              <a:rPr lang="en-US"/>
               <a:t>Click to edit Master title style</a:t>
             </a:r>
-            <a:endParaRPr lang="en-US"/>
           </a:p>
         </p:txBody>
       </p:sp>
@@ -265,10 +280,9 @@
           </a:lstStyle>
           <a:p>
             <a:r>
-              <a:rPr lang="en-US" smtClean="0"/>
+              <a:rPr lang="en-US"/>
               <a:t>Click to edit Master subtitle style</a:t>
             </a:r>
-            <a:endParaRPr lang="en-US"/>
           </a:p>
         </p:txBody>
       </p:sp>
@@ -289,7 +303,7 @@
           <a:p>
             <a:fld id="{5BCAD085-E8A6-8845-BD4E-CB4CCA059FC4}" type="datetimeFigureOut">
               <a:rPr lang="en-US" smtClean="0"/>
-              <a:t>1/27/13</a:t>
+              <a:t>6/24/2026</a:t>
             </a:fld>
             <a:endParaRPr lang="en-US"/>
           </a:p>
@@ -383,10 +397,9 @@
           <a:lstStyle/>
           <a:p>
             <a:r>
-              <a:rPr lang="en-US" smtClean="0"/>
+              <a:rPr lang="en-US"/>
               <a:t>Click to edit Master title style</a:t>
             </a:r>
-            <a:endParaRPr lang="en-US"/>
           </a:p>
         </p:txBody>
       </p:sp>
@@ -407,38 +420,37 @@
           <a:p>
             <a:pPr lvl="0"/>
             <a:r>
-              <a:rPr lang="en-US" smtClean="0"/>
+              <a:rPr lang="en-US"/>
               <a:t>Click to edit Master text styles</a:t>
             </a:r>
           </a:p>
           <a:p>
             <a:pPr lvl="1"/>
             <a:r>
-              <a:rPr lang="en-US" smtClean="0"/>
+              <a:rPr lang="en-US"/>
               <a:t>Second level</a:t>
             </a:r>
           </a:p>
           <a:p>
             <a:pPr lvl="2"/>
             <a:r>
-              <a:rPr lang="en-US" smtClean="0"/>
+              <a:rPr lang="en-US"/>
               <a:t>Third level</a:t>
             </a:r>
           </a:p>
           <a:p>
             <a:pPr lvl="3"/>
             <a:r>
-              <a:rPr lang="en-US" smtClean="0"/>
+              <a:rPr lang="en-US"/>
               <a:t>Fourth level</a:t>
             </a:r>
           </a:p>
           <a:p>
             <a:pPr lvl="4"/>
             <a:r>
-              <a:rPr lang="en-US" smtClean="0"/>
+              <a:rPr lang="en-US"/>
               <a:t>Fifth level</a:t>
             </a:r>
-            <a:endParaRPr lang="en-US"/>
           </a:p>
         </p:txBody>
       </p:sp>
@@ -459,7 +471,7 @@
           <a:p>
             <a:fld id="{5BCAD085-E8A6-8845-BD4E-CB4CCA059FC4}" type="datetimeFigureOut">
               <a:rPr lang="en-US" smtClean="0"/>
-              <a:t>1/27/13</a:t>
+              <a:t>6/24/2026</a:t>
             </a:fld>
             <a:endParaRPr lang="en-US"/>
           </a:p>
@@ -558,10 +570,9 @@
           <a:lstStyle/>
           <a:p>
             <a:r>
-              <a:rPr lang="en-US" smtClean="0"/>
+              <a:rPr lang="en-US"/>
               <a:t>Click to edit Master title style</a:t>
             </a:r>
-            <a:endParaRPr lang="en-US"/>
           </a:p>
         </p:txBody>
       </p:sp>
@@ -587,38 +598,37 @@
           <a:p>
             <a:pPr lvl="0"/>
             <a:r>
-              <a:rPr lang="en-US" smtClean="0"/>
+              <a:rPr lang="en-US"/>
               <a:t>Click to edit Master text styles</a:t>
             </a:r>
           </a:p>
           <a:p>
             <a:pPr lvl="1"/>
             <a:r>
-              <a:rPr lang="en-US" smtClean="0"/>
+              <a:rPr lang="en-US"/>
               <a:t>Second level</a:t>
             </a:r>
           </a:p>
           <a:p>
             <a:pPr lvl="2"/>
             <a:r>
-              <a:rPr lang="en-US" smtClean="0"/>
+              <a:rPr lang="en-US"/>
               <a:t>Third level</a:t>
             </a:r>
           </a:p>
           <a:p>
             <a:pPr lvl="3"/>
             <a:r>
-              <a:rPr lang="en-US" smtClean="0"/>
+              <a:rPr lang="en-US"/>
               <a:t>Fourth level</a:t>
             </a:r>
           </a:p>
           <a:p>
             <a:pPr lvl="4"/>
             <a:r>
-              <a:rPr lang="en-US" smtClean="0"/>
+              <a:rPr lang="en-US"/>
               <a:t>Fifth level</a:t>
             </a:r>
-            <a:endParaRPr lang="en-US"/>
           </a:p>
         </p:txBody>
       </p:sp>
@@ -639,7 +649,7 @@
           <a:p>
             <a:fld id="{5BCAD085-E8A6-8845-BD4E-CB4CCA059FC4}" type="datetimeFigureOut">
               <a:rPr lang="en-US" smtClean="0"/>
-              <a:t>1/27/13</a:t>
+              <a:t>6/24/2026</a:t>
             </a:fld>
             <a:endParaRPr lang="en-US"/>
           </a:p>
@@ -733,10 +743,9 @@
           <a:lstStyle/>
           <a:p>
             <a:r>
-              <a:rPr lang="en-US" smtClean="0"/>
+              <a:rPr lang="en-US"/>
               <a:t>Click to edit Master title style</a:t>
             </a:r>
-            <a:endParaRPr lang="en-US"/>
           </a:p>
         </p:txBody>
       </p:sp>
@@ -757,38 +766,37 @@
           <a:p>
             <a:pPr lvl="0"/>
             <a:r>
-              <a:rPr lang="en-US" smtClean="0"/>
+              <a:rPr lang="en-US"/>
               <a:t>Click to edit Master text styles</a:t>
             </a:r>
           </a:p>
           <a:p>
             <a:pPr lvl="1"/>
             <a:r>
-              <a:rPr lang="en-US" smtClean="0"/>
+              <a:rPr lang="en-US"/>
               <a:t>Second level</a:t>
             </a:r>
           </a:p>
           <a:p>
             <a:pPr lvl="2"/>
             <a:r>
-              <a:rPr lang="en-US" smtClean="0"/>
+              <a:rPr lang="en-US"/>
               <a:t>Third level</a:t>
             </a:r>
           </a:p>
           <a:p>
             <a:pPr lvl="3"/>
             <a:r>
-              <a:rPr lang="en-US" smtClean="0"/>
+              <a:rPr lang="en-US"/>
               <a:t>Fourth level</a:t>
             </a:r>
           </a:p>
           <a:p>
             <a:pPr lvl="4"/>
             <a:r>
-              <a:rPr lang="en-US" smtClean="0"/>
+              <a:rPr lang="en-US"/>
               <a:t>Fifth level</a:t>
             </a:r>
-            <a:endParaRPr lang="en-US"/>
           </a:p>
         </p:txBody>
       </p:sp>
@@ -809,7 +817,7 @@
           <a:p>
             <a:fld id="{5BCAD085-E8A6-8845-BD4E-CB4CCA059FC4}" type="datetimeFigureOut">
               <a:rPr lang="en-US" smtClean="0"/>
-              <a:t>1/27/13</a:t>
+              <a:t>6/24/2026</a:t>
             </a:fld>
             <a:endParaRPr lang="en-US"/>
           </a:p>
@@ -912,10 +920,9 @@
           </a:lstStyle>
           <a:p>
             <a:r>
-              <a:rPr lang="en-US" smtClean="0"/>
+              <a:rPr lang="en-US"/>
               <a:t>Click to edit Master title style</a:t>
             </a:r>
-            <a:endParaRPr lang="en-US"/>
           </a:p>
         </p:txBody>
       </p:sp>
@@ -1032,7 +1039,7 @@
           <a:p>
             <a:pPr lvl="0"/>
             <a:r>
-              <a:rPr lang="en-US" smtClean="0"/>
+              <a:rPr lang="en-US"/>
               <a:t>Click to edit Master text styles</a:t>
             </a:r>
           </a:p>
@@ -1055,7 +1062,7 @@
           <a:p>
             <a:fld id="{5BCAD085-E8A6-8845-BD4E-CB4CCA059FC4}" type="datetimeFigureOut">
               <a:rPr lang="en-US" smtClean="0"/>
-              <a:t>1/27/13</a:t>
+              <a:t>6/24/2026</a:t>
             </a:fld>
             <a:endParaRPr lang="en-US"/>
           </a:p>
@@ -1149,10 +1156,9 @@
           <a:lstStyle/>
           <a:p>
             <a:r>
-              <a:rPr lang="en-US" smtClean="0"/>
+              <a:rPr lang="en-US"/>
               <a:t>Click to edit Master title style</a:t>
             </a:r>
-            <a:endParaRPr lang="en-US"/>
           </a:p>
         </p:txBody>
       </p:sp>
@@ -1206,38 +1212,37 @@
           <a:p>
             <a:pPr lvl="0"/>
             <a:r>
-              <a:rPr lang="en-US" smtClean="0"/>
+              <a:rPr lang="en-US"/>
               <a:t>Click to edit Master text styles</a:t>
             </a:r>
           </a:p>
           <a:p>
             <a:pPr lvl="1"/>
             <a:r>
-              <a:rPr lang="en-US" smtClean="0"/>
+              <a:rPr lang="en-US"/>
               <a:t>Second level</a:t>
             </a:r>
           </a:p>
           <a:p>
             <a:pPr lvl="2"/>
             <a:r>
-              <a:rPr lang="en-US" smtClean="0"/>
+              <a:rPr lang="en-US"/>
               <a:t>Third level</a:t>
             </a:r>
           </a:p>
           <a:p>
             <a:pPr lvl="3"/>
             <a:r>
-              <a:rPr lang="en-US" smtClean="0"/>
+              <a:rPr lang="en-US"/>
               <a:t>Fourth level</a:t>
             </a:r>
           </a:p>
           <a:p>
             <a:pPr lvl="4"/>
             <a:r>
-              <a:rPr lang="en-US" smtClean="0"/>
+              <a:rPr lang="en-US"/>
               <a:t>Fifth level</a:t>
             </a:r>
-            <a:endParaRPr lang="en-US"/>
           </a:p>
         </p:txBody>
       </p:sp>
@@ -1291,38 +1296,37 @@
           <a:p>
             <a:pPr lvl="0"/>
             <a:r>
-              <a:rPr lang="en-US" smtClean="0"/>
+              <a:rPr lang="en-US"/>
               <a:t>Click to edit Master text styles</a:t>
             </a:r>
           </a:p>
           <a:p>
             <a:pPr lvl="1"/>
             <a:r>
-              <a:rPr lang="en-US" smtClean="0"/>
+              <a:rPr lang="en-US"/>
               <a:t>Second level</a:t>
             </a:r>
           </a:p>
           <a:p>
             <a:pPr lvl="2"/>
             <a:r>
-              <a:rPr lang="en-US" smtClean="0"/>
+              <a:rPr lang="en-US"/>
               <a:t>Third level</a:t>
             </a:r>
           </a:p>
           <a:p>
             <a:pPr lvl="3"/>
             <a:r>
-              <a:rPr lang="en-US" smtClean="0"/>
+              <a:rPr lang="en-US"/>
               <a:t>Fourth level</a:t>
             </a:r>
           </a:p>
           <a:p>
             <a:pPr lvl="4"/>
             <a:r>
-              <a:rPr lang="en-US" smtClean="0"/>
+              <a:rPr lang="en-US"/>
               <a:t>Fifth level</a:t>
             </a:r>
-            <a:endParaRPr lang="en-US"/>
           </a:p>
         </p:txBody>
       </p:sp>
@@ -1343,7 +1347,7 @@
           <a:p>
             <a:fld id="{5BCAD085-E8A6-8845-BD4E-CB4CCA059FC4}" type="datetimeFigureOut">
               <a:rPr lang="en-US" smtClean="0"/>
-              <a:t>1/27/13</a:t>
+              <a:t>6/24/2026</a:t>
             </a:fld>
             <a:endParaRPr lang="en-US"/>
           </a:p>
@@ -1441,10 +1445,9 @@
           </a:lstStyle>
           <a:p>
             <a:r>
-              <a:rPr lang="en-US" smtClean="0"/>
+              <a:rPr lang="en-US"/>
               <a:t>Click to edit Master title style</a:t>
             </a:r>
-            <a:endParaRPr lang="en-US"/>
           </a:p>
         </p:txBody>
       </p:sp>
@@ -1507,7 +1510,7 @@
           <a:p>
             <a:pPr lvl="0"/>
             <a:r>
-              <a:rPr lang="en-US" smtClean="0"/>
+              <a:rPr lang="en-US"/>
               <a:t>Click to edit Master text styles</a:t>
             </a:r>
           </a:p>
@@ -1563,38 +1566,37 @@
           <a:p>
             <a:pPr lvl="0"/>
             <a:r>
-              <a:rPr lang="en-US" smtClean="0"/>
+              <a:rPr lang="en-US"/>
               <a:t>Click to edit Master text styles</a:t>
             </a:r>
           </a:p>
           <a:p>
             <a:pPr lvl="1"/>
             <a:r>
-              <a:rPr lang="en-US" smtClean="0"/>
+              <a:rPr lang="en-US"/>
               <a:t>Second level</a:t>
             </a:r>
           </a:p>
           <a:p>
             <a:pPr lvl="2"/>
             <a:r>
-              <a:rPr lang="en-US" smtClean="0"/>
+              <a:rPr lang="en-US"/>
               <a:t>Third level</a:t>
             </a:r>
           </a:p>
           <a:p>
             <a:pPr lvl="3"/>
             <a:r>
-              <a:rPr lang="en-US" smtClean="0"/>
+              <a:rPr lang="en-US"/>
               <a:t>Fourth level</a:t>
             </a:r>
           </a:p>
           <a:p>
             <a:pPr lvl="4"/>
             <a:r>
-              <a:rPr lang="en-US" smtClean="0"/>
+              <a:rPr lang="en-US"/>
               <a:t>Fifth level</a:t>
             </a:r>
-            <a:endParaRPr lang="en-US"/>
           </a:p>
         </p:txBody>
       </p:sp>
@@ -1657,7 +1659,7 @@
           <a:p>
             <a:pPr lvl="0"/>
             <a:r>
-              <a:rPr lang="en-US" smtClean="0"/>
+              <a:rPr lang="en-US"/>
               <a:t>Click to edit Master text styles</a:t>
             </a:r>
           </a:p>
@@ -1713,38 +1715,37 @@
           <a:p>
             <a:pPr lvl="0"/>
             <a:r>
-              <a:rPr lang="en-US" smtClean="0"/>
+              <a:rPr lang="en-US"/>
               <a:t>Click to edit Master text styles</a:t>
             </a:r>
           </a:p>
           <a:p>
             <a:pPr lvl="1"/>
             <a:r>
-              <a:rPr lang="en-US" smtClean="0"/>
+              <a:rPr lang="en-US"/>
               <a:t>Second level</a:t>
             </a:r>
           </a:p>
           <a:p>
             <a:pPr lvl="2"/>
             <a:r>
-              <a:rPr lang="en-US" smtClean="0"/>
+              <a:rPr lang="en-US"/>
               <a:t>Third level</a:t>
             </a:r>
           </a:p>
           <a:p>
             <a:pPr lvl="3"/>
             <a:r>
-              <a:rPr lang="en-US" smtClean="0"/>
+              <a:rPr lang="en-US"/>
               <a:t>Fourth level</a:t>
             </a:r>
           </a:p>
           <a:p>
             <a:pPr lvl="4"/>
             <a:r>
-              <a:rPr lang="en-US" smtClean="0"/>
+              <a:rPr lang="en-US"/>
               <a:t>Fifth level</a:t>
             </a:r>
-            <a:endParaRPr lang="en-US"/>
           </a:p>
         </p:txBody>
       </p:sp>
@@ -1765,7 +1766,7 @@
           <a:p>
             <a:fld id="{5BCAD085-E8A6-8845-BD4E-CB4CCA059FC4}" type="datetimeFigureOut">
               <a:rPr lang="en-US" smtClean="0"/>
-              <a:t>1/27/13</a:t>
+              <a:t>6/24/2026</a:t>
             </a:fld>
             <a:endParaRPr lang="en-US"/>
           </a:p>
@@ -1859,10 +1860,9 @@
           <a:lstStyle/>
           <a:p>
             <a:r>
-              <a:rPr lang="en-US" smtClean="0"/>
+              <a:rPr lang="en-US"/>
               <a:t>Click to edit Master title style</a:t>
             </a:r>
-            <a:endParaRPr lang="en-US"/>
           </a:p>
         </p:txBody>
       </p:sp>
@@ -1883,7 +1883,7 @@
           <a:p>
             <a:fld id="{5BCAD085-E8A6-8845-BD4E-CB4CCA059FC4}" type="datetimeFigureOut">
               <a:rPr lang="en-US" smtClean="0"/>
-              <a:t>1/27/13</a:t>
+              <a:t>6/24/2026</a:t>
             </a:fld>
             <a:endParaRPr lang="en-US"/>
           </a:p>
@@ -1978,7 +1978,7 @@
           <a:p>
             <a:fld id="{5BCAD085-E8A6-8845-BD4E-CB4CCA059FC4}" type="datetimeFigureOut">
               <a:rPr lang="en-US" smtClean="0"/>
-              <a:t>1/27/13</a:t>
+              <a:t>6/24/2026</a:t>
             </a:fld>
             <a:endParaRPr lang="en-US"/>
           </a:p>
@@ -2081,10 +2081,9 @@
           </a:lstStyle>
           <a:p>
             <a:r>
-              <a:rPr lang="en-US" smtClean="0"/>
+              <a:rPr lang="en-US"/>
               <a:t>Click to edit Master title style</a:t>
             </a:r>
-            <a:endParaRPr lang="en-US"/>
           </a:p>
         </p:txBody>
       </p:sp>
@@ -2138,38 +2137,37 @@
           <a:p>
             <a:pPr lvl="0"/>
             <a:r>
-              <a:rPr lang="en-US" smtClean="0"/>
+              <a:rPr lang="en-US"/>
               <a:t>Click to edit Master text styles</a:t>
             </a:r>
           </a:p>
           <a:p>
             <a:pPr lvl="1"/>
             <a:r>
-              <a:rPr lang="en-US" smtClean="0"/>
+              <a:rPr lang="en-US"/>
               <a:t>Second level</a:t>
             </a:r>
           </a:p>
           <a:p>
             <a:pPr lvl="2"/>
             <a:r>
-              <a:rPr lang="en-US" smtClean="0"/>
+              <a:rPr lang="en-US"/>
               <a:t>Third level</a:t>
             </a:r>
           </a:p>
           <a:p>
             <a:pPr lvl="3"/>
             <a:r>
-              <a:rPr lang="en-US" smtClean="0"/>
+              <a:rPr lang="en-US"/>
               <a:t>Fourth level</a:t>
             </a:r>
           </a:p>
           <a:p>
             <a:pPr lvl="4"/>
             <a:r>
-              <a:rPr lang="en-US" smtClean="0"/>
+              <a:rPr lang="en-US"/>
               <a:t>Fifth level</a:t>
             </a:r>
-            <a:endParaRPr lang="en-US"/>
           </a:p>
         </p:txBody>
       </p:sp>
@@ -2232,7 +2230,7 @@
           <a:p>
             <a:pPr lvl="0"/>
             <a:r>
-              <a:rPr lang="en-US" smtClean="0"/>
+              <a:rPr lang="en-US"/>
               <a:t>Click to edit Master text styles</a:t>
             </a:r>
           </a:p>
@@ -2255,7 +2253,7 @@
           <a:p>
             <a:fld id="{5BCAD085-E8A6-8845-BD4E-CB4CCA059FC4}" type="datetimeFigureOut">
               <a:rPr lang="en-US" smtClean="0"/>
-              <a:t>1/27/13</a:t>
+              <a:t>6/24/2026</a:t>
             </a:fld>
             <a:endParaRPr lang="en-US"/>
           </a:p>
@@ -2358,10 +2356,9 @@
           </a:lstStyle>
           <a:p>
             <a:r>
-              <a:rPr lang="en-US" smtClean="0"/>
+              <a:rPr lang="en-US"/>
               <a:t>Click to edit Master title style</a:t>
             </a:r>
-            <a:endParaRPr lang="en-US"/>
           </a:p>
         </p:txBody>
       </p:sp>
@@ -2485,7 +2482,7 @@
           <a:p>
             <a:pPr lvl="0"/>
             <a:r>
-              <a:rPr lang="en-US" smtClean="0"/>
+              <a:rPr lang="en-US"/>
               <a:t>Click to edit Master text styles</a:t>
             </a:r>
           </a:p>
@@ -2508,7 +2505,7 @@
           <a:p>
             <a:fld id="{5BCAD085-E8A6-8845-BD4E-CB4CCA059FC4}" type="datetimeFigureOut">
               <a:rPr lang="en-US" smtClean="0"/>
-              <a:t>1/27/13</a:t>
+              <a:t>6/24/2026</a:t>
             </a:fld>
             <a:endParaRPr lang="en-US"/>
           </a:p>
@@ -2617,10 +2614,9 @@
           <a:lstStyle/>
           <a:p>
             <a:r>
-              <a:rPr lang="en-US" smtClean="0"/>
+              <a:rPr lang="en-US"/>
               <a:t>Click to edit Master title style</a:t>
             </a:r>
-            <a:endParaRPr lang="en-US"/>
           </a:p>
         </p:txBody>
       </p:sp>
@@ -2651,38 +2647,37 @@
           <a:p>
             <a:pPr lvl="0"/>
             <a:r>
-              <a:rPr lang="en-US" smtClean="0"/>
+              <a:rPr lang="en-US"/>
               <a:t>Click to edit Master text styles</a:t>
             </a:r>
           </a:p>
           <a:p>
             <a:pPr lvl="1"/>
             <a:r>
-              <a:rPr lang="en-US" smtClean="0"/>
+              <a:rPr lang="en-US"/>
               <a:t>Second level</a:t>
             </a:r>
           </a:p>
           <a:p>
             <a:pPr lvl="2"/>
             <a:r>
-              <a:rPr lang="en-US" smtClean="0"/>
+              <a:rPr lang="en-US"/>
               <a:t>Third level</a:t>
             </a:r>
           </a:p>
           <a:p>
             <a:pPr lvl="3"/>
             <a:r>
-              <a:rPr lang="en-US" smtClean="0"/>
+              <a:rPr lang="en-US"/>
               <a:t>Fourth level</a:t>
             </a:r>
           </a:p>
           <a:p>
             <a:pPr lvl="4"/>
             <a:r>
-              <a:rPr lang="en-US" smtClean="0"/>
+              <a:rPr lang="en-US"/>
               <a:t>Fifth level</a:t>
             </a:r>
-            <a:endParaRPr lang="en-US"/>
           </a:p>
         </p:txBody>
       </p:sp>
@@ -2721,7 +2716,7 @@
           <a:p>
             <a:fld id="{5BCAD085-E8A6-8845-BD4E-CB4CCA059FC4}" type="datetimeFigureOut">
               <a:rPr lang="en-US" smtClean="0"/>
-              <a:t>1/27/13</a:t>
+              <a:t>6/24/2026</a:t>
             </a:fld>
             <a:endParaRPr lang="en-US"/>
           </a:p>
@@ -3080,7 +3075,7 @@
 </file>
 
 <file path=ppt/slides/slide1.xml><?xml version="1.0" encoding="utf-8"?>
-<p:sld xmlns:a="http://schemas.openxmlformats.org/drawingml/2006/main" xmlns:p="http://schemas.openxmlformats.org/presentationml/2006/main" xmlns:r="http://schemas.openxmlformats.org/officeDocument/2006/relationships">
+<p:sld xmlns:a="http://schemas.openxmlformats.org/drawingml/2006/main" xmlns:r="http://schemas.openxmlformats.org/officeDocument/2006/relationships" xmlns:p="http://schemas.openxmlformats.org/presentationml/2006/main">
   <p:cSld>
     <p:spTree>
       <p:nvGrpSpPr>
@@ -3088,7 +3083,106 @@
         <p:cNvGrpSpPr/>
         <p:nvPr/>
       </p:nvGrpSpPr>
-      <p:grpSpPr/>
+      <p:grpSpPr>
+        <a:xfrm>
+          <a:off x="0" y="0"/>
+          <a:ext cx="0" cy="0"/>
+          <a:chOff x="0" y="0"/>
+          <a:chExt cx="0" cy="0"/>
+        </a:xfrm>
+      </p:grpSpPr>
+      <p:sp>
+        <p:nvSpPr>
+          <p:cNvPr id="48" name="Rounded Rectangle 47"/>
+          <p:cNvSpPr/>
+          <p:nvPr/>
+        </p:nvSpPr>
+        <p:spPr>
+          <a:xfrm>
+            <a:off x="6226937" y="5474081"/>
+            <a:ext cx="1080000" cy="252000"/>
+          </a:xfrm>
+          <a:prstGeom prst="roundRect">
+            <a:avLst/>
+          </a:prstGeom>
+          <a:solidFill>
+            <a:srgbClr val="DBEAFE"/>
+          </a:solidFill>
+          <a:ln w="12700">
+            <a:solidFill>
+              <a:srgbClr val="E2E8F0"/>
+            </a:solidFill>
+          </a:ln>
+        </p:spPr>
+        <p:style>
+          <a:lnRef idx="1">
+            <a:schemeClr val="accent1"/>
+          </a:lnRef>
+          <a:fillRef idx="3">
+            <a:schemeClr val="accent1"/>
+          </a:fillRef>
+          <a:effectRef idx="2">
+            <a:schemeClr val="accent1"/>
+          </a:effectRef>
+          <a:fontRef idx="minor">
+            <a:schemeClr val="lt1"/>
+          </a:fontRef>
+        </p:style>
+        <p:txBody>
+          <a:bodyPr rtlCol="0" anchor="ctr"/>
+          <a:lstStyle/>
+          <a:p>
+            <a:pPr algn="ctr"/>
+            <a:endParaRPr dirty="0"/>
+          </a:p>
+        </p:txBody>
+      </p:sp>
+      <p:sp>
+        <p:nvSpPr>
+          <p:cNvPr id="78" name="Rounded Rectangle 77"/>
+          <p:cNvSpPr/>
+          <p:nvPr/>
+        </p:nvSpPr>
+        <p:spPr>
+          <a:xfrm>
+            <a:off x="6227762" y="5808123"/>
+            <a:ext cx="1080000" cy="252000"/>
+          </a:xfrm>
+          <a:prstGeom prst="roundRect">
+            <a:avLst/>
+          </a:prstGeom>
+          <a:solidFill>
+            <a:srgbClr val="DBEAFE"/>
+          </a:solidFill>
+          <a:ln w="12700">
+            <a:solidFill>
+              <a:srgbClr val="E2E8F0"/>
+            </a:solidFill>
+          </a:ln>
+        </p:spPr>
+        <p:style>
+          <a:lnRef idx="1">
+            <a:schemeClr val="accent1"/>
+          </a:lnRef>
+          <a:fillRef idx="3">
+            <a:schemeClr val="accent1"/>
+          </a:fillRef>
+          <a:effectRef idx="2">
+            <a:schemeClr val="accent1"/>
+          </a:effectRef>
+          <a:fontRef idx="minor">
+            <a:schemeClr val="lt1"/>
+          </a:fontRef>
+        </p:style>
+        <p:txBody>
+          <a:bodyPr rtlCol="0" anchor="ctr"/>
+          <a:lstStyle/>
+          <a:p>
+            <a:pPr algn="ctr"/>
+            <a:endParaRPr/>
+          </a:p>
+        </p:txBody>
+      </p:sp>
       <p:sp>
         <p:nvSpPr>
           <p:cNvPr id="2" name="Rectangle 1"/>
@@ -3131,6 +3225,7 @@
           <a:lstStyle/>
           <a:p>
             <a:pPr algn="ctr"/>
+            <a:endParaRPr/>
           </a:p>
         </p:txBody>
       </p:sp>
@@ -3176,6 +3271,7 @@
           <a:lstStyle/>
           <a:p>
             <a:pPr algn="ctr"/>
+            <a:endParaRPr/>
           </a:p>
         </p:txBody>
       </p:sp>
@@ -3214,9 +3310,6 @@
                 </a:solidFill>
                 <a:latin typeface="Segoe UI"/>
               </a:defRPr>
-              <a:lnSpc>
-                <a:spcPct val="114999"/>
-              </a:lnSpc>
             </a:pPr>
             <a:r>
               <a:t>🛡</a:t>
@@ -3259,9 +3352,6 @@
                 </a:solidFill>
                 <a:latin typeface="Segoe UI"/>
               </a:defRPr>
-              <a:lnSpc>
-                <a:spcPct val="114999"/>
-              </a:lnSpc>
             </a:pPr>
             <a:r>
               <a:t>VisionGuard</a:t>
@@ -3304,9 +3394,6 @@
                 </a:solidFill>
                 <a:latin typeface="Segoe UI"/>
               </a:defRPr>
-              <a:lnSpc>
-                <a:spcPct val="114999"/>
-              </a:lnSpc>
             </a:pPr>
             <a:r>
               <a:t>AI Construction Safety Inspection Platform · 建筑施工AI安全巡检平台</a:t>
@@ -3356,6 +3443,7 @@
           <a:lstStyle/>
           <a:p>
             <a:pPr algn="ctr"/>
+            <a:endParaRPr/>
           </a:p>
         </p:txBody>
       </p:sp>
@@ -3394,9 +3482,6 @@
                 </a:solidFill>
                 <a:latin typeface="Segoe UI"/>
               </a:defRPr>
-              <a:lnSpc>
-                <a:spcPct val="114999"/>
-              </a:lnSpc>
             </a:pPr>
             <a:r>
               <a:t>AI-POWERED · YOLO + VLM</a:t>
@@ -3411,19 +3496,25 @@
           <p:nvPr/>
         </p:nvSpPr>
         <p:spPr>
-          <a:xfrm>
-            <a:off x="360000" y="737999"/>
-            <a:ext cx="6840000" cy="10800"/>
+          <a:xfrm flipV="1">
+            <a:off x="360000" y="692278"/>
+            <a:ext cx="6840000" cy="45719"/>
           </a:xfrm>
           <a:prstGeom prst="rect">
             <a:avLst/>
           </a:prstGeom>
           <a:solidFill>
-            <a:srgbClr val="E2E8F0"/>
+            <a:schemeClr val="tx2">
+              <a:lumMod val="60000"/>
+              <a:lumOff val="40000"/>
+            </a:schemeClr>
           </a:solidFill>
           <a:ln w="12700">
             <a:solidFill>
-              <a:srgbClr val="E2E8F0"/>
+              <a:schemeClr val="tx2">
+                <a:lumMod val="60000"/>
+                <a:lumOff val="40000"/>
+              </a:schemeClr>
             </a:solidFill>
           </a:ln>
         </p:spPr>
@@ -3446,6 +3537,7 @@
           <a:lstStyle/>
           <a:p>
             <a:pPr algn="ctr"/>
+            <a:endParaRPr/>
           </a:p>
         </p:txBody>
       </p:sp>
@@ -3458,7 +3550,7 @@
         <p:spPr>
           <a:xfrm>
             <a:off x="360000" y="827999"/>
-            <a:ext cx="3960000" cy="576000"/>
+            <a:ext cx="3401999" cy="646331"/>
           </a:xfrm>
           <a:prstGeom prst="rect">
             <a:avLst/>
@@ -3484,11 +3576,9 @@
                 </a:solidFill>
                 <a:latin typeface="Segoe UI"/>
               </a:defRPr>
-              <a:lnSpc>
-                <a:spcPct val="114999"/>
-              </a:lnSpc>
-            </a:pPr>
-            <a:r>
+            </a:pPr>
+            <a:r>
+              <a:rPr dirty="0"/>
               <a:t>Your Site's AI Safety Net That Never Sleeps</a:t>
             </a:r>
           </a:p>
@@ -3502,7 +3592,7 @@
         </p:nvSpPr>
         <p:spPr>
           <a:xfrm>
-            <a:off x="360000" y="1367999"/>
+            <a:off x="377999" y="1710805"/>
             <a:ext cx="3960000" cy="432000"/>
           </a:xfrm>
           <a:prstGeom prst="rect">
@@ -3529,12 +3619,14 @@
                 </a:solidFill>
                 <a:latin typeface="Segoe UI"/>
               </a:defRPr>
-              <a:lnSpc>
-                <a:spcPct val="114999"/>
-              </a:lnSpc>
-            </a:pPr>
-            <a:r>
-              <a:t>VisionGuard combines real-time YOLO object detection with VLM secondary verification to monitor construction sites 24/7. AI flags every potential hazard — human reviewers confirm or dismiss — and the platform tracks every issue through to rectification closure.</a:t>
+            </a:pPr>
+            <a:r>
+              <a:rPr dirty="0" err="1"/>
+              <a:t>VisionGuard</a:t>
+            </a:r>
+            <a:r>
+              <a:rPr dirty="0"/>
+              <a:t> combines real-time YOLO object detection with VLM secondary verification to monitor construction sites 24/7. AI flags every potential hazard — human reviewers confirm or dismiss — and the platform tracks every issue through to rectification closure.</a:t>
             </a:r>
           </a:p>
         </p:txBody>
@@ -3547,7 +3639,7 @@
         </p:nvSpPr>
         <p:spPr>
           <a:xfrm>
-            <a:off x="360000" y="1727999"/>
+            <a:off x="360000" y="2260577"/>
             <a:ext cx="3960000" cy="180000"/>
           </a:xfrm>
           <a:prstGeom prst="rect">
@@ -3574,13 +3666,36 @@
                 </a:solidFill>
                 <a:latin typeface="Segoe UI"/>
               </a:defRPr>
-              <a:lnSpc>
-                <a:spcPct val="114999"/>
-              </a:lnSpc>
-            </a:pPr>
-            <a:r>
-              <a:t>全天候AI视频智能巡检 · YOLO实时检测+VLM大模型二次复核 · 人机协同精准判识 · 全链路闭环管理</a:t>
-            </a:r>
+            </a:pPr>
+            <a:r>
+              <a:rPr dirty="0" err="1"/>
+              <a:t>全天候AI视频智能巡检</a:t>
+            </a:r>
+            <a:r>
+              <a:rPr dirty="0"/>
+              <a:t> · </a:t>
+            </a:r>
+            <a:r>
+              <a:rPr dirty="0" err="1"/>
+              <a:t>YOLO实时检测+VLM大模型二次复核</a:t>
+            </a:r>
+            <a:r>
+              <a:rPr dirty="0"/>
+              <a:t> · </a:t>
+            </a:r>
+            <a:r>
+              <a:rPr dirty="0" err="1"/>
+              <a:t>人机协同精准判识</a:t>
+            </a:r>
+            <a:r>
+              <a:rPr dirty="0"/>
+              <a:t> · </a:t>
+            </a:r>
+            <a:r>
+              <a:rPr dirty="0" err="1"/>
+              <a:t>全链路闭环管理</a:t>
+            </a:r>
+            <a:endParaRPr dirty="0"/>
           </a:p>
         </p:txBody>
       </p:sp>
@@ -3592,8 +3707,8 @@
         </p:nvSpPr>
         <p:spPr>
           <a:xfrm>
-            <a:off x="360000" y="1943999"/>
-            <a:ext cx="900000" cy="468000"/>
+            <a:off x="4580399" y="909996"/>
+            <a:ext cx="900000" cy="627751"/>
           </a:xfrm>
           <a:prstGeom prst="roundRect">
             <a:avLst/>
@@ -3626,6 +3741,7 @@
           <a:lstStyle/>
           <a:p>
             <a:pPr algn="ctr"/>
+            <a:endParaRPr/>
           </a:p>
         </p:txBody>
       </p:sp>
@@ -3637,8 +3753,8 @@
         </p:nvSpPr>
         <p:spPr>
           <a:xfrm>
-            <a:off x="360000" y="1961999"/>
-            <a:ext cx="900000" cy="251999"/>
+            <a:off x="4580399" y="927997"/>
+            <a:ext cx="900000" cy="307777"/>
           </a:xfrm>
           <a:prstGeom prst="rect">
             <a:avLst/>
@@ -3664,9 +3780,6 @@
                 </a:solidFill>
                 <a:latin typeface="Segoe UI"/>
               </a:defRPr>
-              <a:lnSpc>
-                <a:spcPct val="114999"/>
-              </a:lnSpc>
             </a:pPr>
             <a:r>
               <a:t>12</a:t>
@@ -3682,8 +3795,8 @@
         </p:nvSpPr>
         <p:spPr>
           <a:xfrm>
-            <a:off x="360000" y="2213999"/>
-            <a:ext cx="900000" cy="216000"/>
+            <a:off x="4580399" y="1179997"/>
+            <a:ext cx="900000" cy="261610"/>
           </a:xfrm>
           <a:prstGeom prst="rect">
             <a:avLst/>
@@ -3709,9 +3822,6 @@
                 </a:solidFill>
                 <a:latin typeface="Segoe UI"/>
               </a:defRPr>
-              <a:lnSpc>
-                <a:spcPct val="114999"/>
-              </a:lnSpc>
             </a:pPr>
             <a:r>
               <a:t>Hazard Types</a:t>
@@ -3731,8 +3841,8 @@
         </p:nvSpPr>
         <p:spPr>
           <a:xfrm>
-            <a:off x="1368000" y="1943999"/>
-            <a:ext cx="900000" cy="468000"/>
+            <a:off x="6087931" y="909997"/>
+            <a:ext cx="900000" cy="627750"/>
           </a:xfrm>
           <a:prstGeom prst="roundRect">
             <a:avLst/>
@@ -3765,6 +3875,7 @@
           <a:lstStyle/>
           <a:p>
             <a:pPr algn="ctr"/>
+            <a:endParaRPr/>
           </a:p>
         </p:txBody>
       </p:sp>
@@ -3776,8 +3887,8 @@
         </p:nvSpPr>
         <p:spPr>
           <a:xfrm>
-            <a:off x="1368000" y="1961999"/>
-            <a:ext cx="900000" cy="251999"/>
+            <a:off x="6087931" y="927997"/>
+            <a:ext cx="900000" cy="307777"/>
           </a:xfrm>
           <a:prstGeom prst="rect">
             <a:avLst/>
@@ -3803,9 +3914,6 @@
                 </a:solidFill>
                 <a:latin typeface="Segoe UI"/>
               </a:defRPr>
-              <a:lnSpc>
-                <a:spcPct val="114999"/>
-              </a:lnSpc>
             </a:pPr>
             <a:r>
               <a:t>4</a:t>
@@ -3821,8 +3929,8 @@
         </p:nvSpPr>
         <p:spPr>
           <a:xfrm>
-            <a:off x="1368000" y="2213999"/>
-            <a:ext cx="900000" cy="216000"/>
+            <a:off x="6087931" y="1179997"/>
+            <a:ext cx="900000" cy="261610"/>
           </a:xfrm>
           <a:prstGeom prst="rect">
             <a:avLst/>
@@ -3848,9 +3956,6 @@
                 </a:solidFill>
                 <a:latin typeface="Segoe UI"/>
               </a:defRPr>
-              <a:lnSpc>
-                <a:spcPct val="114999"/>
-              </a:lnSpc>
             </a:pPr>
             <a:r>
               <a:t>User Roles</a:t>
@@ -3870,8 +3975,8 @@
         </p:nvSpPr>
         <p:spPr>
           <a:xfrm>
-            <a:off x="2376000" y="1943999"/>
-            <a:ext cx="900000" cy="468000"/>
+            <a:off x="4580399" y="1796946"/>
+            <a:ext cx="900000" cy="627750"/>
           </a:xfrm>
           <a:prstGeom prst="roundRect">
             <a:avLst/>
@@ -3904,6 +4009,7 @@
           <a:lstStyle/>
           <a:p>
             <a:pPr algn="ctr"/>
+            <a:endParaRPr/>
           </a:p>
         </p:txBody>
       </p:sp>
@@ -3915,8 +4021,8 @@
         </p:nvSpPr>
         <p:spPr>
           <a:xfrm>
-            <a:off x="2376000" y="1961999"/>
-            <a:ext cx="900000" cy="251999"/>
+            <a:off x="4580399" y="1814946"/>
+            <a:ext cx="900000" cy="307777"/>
           </a:xfrm>
           <a:prstGeom prst="rect">
             <a:avLst/>
@@ -3942,9 +4048,6 @@
                 </a:solidFill>
                 <a:latin typeface="Segoe UI"/>
               </a:defRPr>
-              <a:lnSpc>
-                <a:spcPct val="114999"/>
-              </a:lnSpc>
             </a:pPr>
             <a:r>
               <a:t>6</a:t>
@@ -3960,8 +4063,8 @@
         </p:nvSpPr>
         <p:spPr>
           <a:xfrm>
-            <a:off x="2376000" y="2213999"/>
-            <a:ext cx="900000" cy="216000"/>
+            <a:off x="4580399" y="2066946"/>
+            <a:ext cx="900000" cy="261610"/>
           </a:xfrm>
           <a:prstGeom prst="rect">
             <a:avLst/>
@@ -3987,9 +4090,6 @@
                 </a:solidFill>
                 <a:latin typeface="Segoe UI"/>
               </a:defRPr>
-              <a:lnSpc>
-                <a:spcPct val="114999"/>
-              </a:lnSpc>
             </a:pPr>
             <a:r>
               <a:t>Closed-Loop</a:t>
@@ -4009,8 +4109,8 @@
         </p:nvSpPr>
         <p:spPr>
           <a:xfrm>
-            <a:off x="3383999" y="1943999"/>
-            <a:ext cx="900000" cy="468000"/>
+            <a:off x="6083698" y="1796946"/>
+            <a:ext cx="900000" cy="627750"/>
           </a:xfrm>
           <a:prstGeom prst="roundRect">
             <a:avLst/>
@@ -4043,6 +4143,7 @@
           <a:lstStyle/>
           <a:p>
             <a:pPr algn="ctr"/>
+            <a:endParaRPr/>
           </a:p>
         </p:txBody>
       </p:sp>
@@ -4054,8 +4155,8 @@
         </p:nvSpPr>
         <p:spPr>
           <a:xfrm>
-            <a:off x="3383999" y="1961999"/>
-            <a:ext cx="900000" cy="251999"/>
+            <a:off x="6083698" y="1814946"/>
+            <a:ext cx="900000" cy="307777"/>
           </a:xfrm>
           <a:prstGeom prst="rect">
             <a:avLst/>
@@ -4081,9 +4182,6 @@
                 </a:solidFill>
                 <a:latin typeface="Segoe UI"/>
               </a:defRPr>
-              <a:lnSpc>
-                <a:spcPct val="114999"/>
-              </a:lnSpc>
             </a:pPr>
             <a:r>
               <a:t>24/7</a:t>
@@ -4099,8 +4197,8 @@
         </p:nvSpPr>
         <p:spPr>
           <a:xfrm>
-            <a:off x="3383999" y="2213999"/>
-            <a:ext cx="900000" cy="216000"/>
+            <a:off x="6083698" y="2066946"/>
+            <a:ext cx="900000" cy="261610"/>
           </a:xfrm>
           <a:prstGeom prst="rect">
             <a:avLst/>
@@ -4126,17 +4224,19 @@
                 </a:solidFill>
                 <a:latin typeface="Segoe UI"/>
               </a:defRPr>
-              <a:lnSpc>
-                <a:spcPct val="114999"/>
-              </a:lnSpc>
-            </a:pPr>
-            <a:r>
+            </a:pPr>
+            <a:r>
+              <a:rPr dirty="0"/>
               <a:t>Real-Time</a:t>
             </a:r>
-            <a:br/>
-            <a:r>
+            <a:br>
+              <a:rPr dirty="0"/>
+            </a:br>
+            <a:r>
+              <a:rPr dirty="0" err="1"/>
               <a:t>全天候监控</a:t>
             </a:r>
+            <a:endParaRPr dirty="0"/>
           </a:p>
         </p:txBody>
       </p:sp>
@@ -4148,8 +4248,8 @@
         </p:nvSpPr>
         <p:spPr>
           <a:xfrm>
-            <a:off x="4500000" y="827999"/>
-            <a:ext cx="2700000" cy="756000"/>
+            <a:off x="3887998" y="2764577"/>
+            <a:ext cx="3384002" cy="2119050"/>
           </a:xfrm>
           <a:prstGeom prst="rect">
             <a:avLst/>
@@ -4179,7 +4279,7 @@
           </a:fontRef>
         </p:style>
         <p:txBody>
-          <a:bodyPr rtlCol="0" anchor="ctr" wrap="square"/>
+          <a:bodyPr wrap="square" rtlCol="0" anchor="ctr"/>
           <a:lstStyle/>
           <a:p>
             <a:pPr algn="ctr">
@@ -4189,6 +4289,7 @@
               <a:defRPr sz="1600"/>
             </a:pPr>
             <a:r>
+              <a:rPr dirty="0"/>
               <a:t>🖼</a:t>
             </a:r>
           </a:p>
@@ -4202,6 +4303,7 @@
               </a:defRPr>
             </a:pPr>
             <a:r>
+              <a:rPr dirty="0"/>
               <a:t>AI Review Workbench</a:t>
             </a:r>
           </a:p>
@@ -4215,8 +4317,10 @@
               </a:defRPr>
             </a:pPr>
             <a:r>
+              <a:rPr dirty="0" err="1"/>
               <a:t>人工复核工作台截图</a:t>
             </a:r>
+            <a:endParaRPr dirty="0"/>
           </a:p>
         </p:txBody>
       </p:sp>
@@ -4228,8 +4332,8 @@
         </p:nvSpPr>
         <p:spPr>
           <a:xfrm>
-            <a:off x="4500000" y="1655998"/>
-            <a:ext cx="2700000" cy="756000"/>
+            <a:off x="360000" y="2766829"/>
+            <a:ext cx="3294000" cy="2116798"/>
           </a:xfrm>
           <a:prstGeom prst="rect">
             <a:avLst/>
@@ -4259,7 +4363,7 @@
           </a:fontRef>
         </p:style>
         <p:txBody>
-          <a:bodyPr rtlCol="0" anchor="ctr" wrap="square"/>
+          <a:bodyPr wrap="square" rtlCol="0" anchor="ctr"/>
           <a:lstStyle/>
           <a:p>
             <a:pPr algn="ctr">
@@ -4269,6 +4373,7 @@
               <a:defRPr sz="1600"/>
             </a:pPr>
             <a:r>
+              <a:rPr dirty="0"/>
               <a:t>🖼</a:t>
             </a:r>
           </a:p>
@@ -4282,6 +4387,7 @@
               </a:defRPr>
             </a:pPr>
             <a:r>
+              <a:rPr dirty="0"/>
               <a:t>Executive Dashboard</a:t>
             </a:r>
           </a:p>
@@ -4295,8 +4401,10 @@
               </a:defRPr>
             </a:pPr>
             <a:r>
+              <a:rPr dirty="0" err="1"/>
               <a:t>工作台总览截图</a:t>
             </a:r>
+            <a:endParaRPr dirty="0"/>
           </a:p>
         </p:txBody>
       </p:sp>
@@ -4308,8 +4416,8 @@
         </p:nvSpPr>
         <p:spPr>
           <a:xfrm>
-            <a:off x="360000" y="2592000"/>
-            <a:ext cx="162000" cy="162000"/>
+            <a:off x="360000" y="5248578"/>
+            <a:ext cx="162000" cy="162001"/>
           </a:xfrm>
           <a:prstGeom prst="roundRect">
             <a:avLst/>
@@ -4342,6 +4450,7 @@
           <a:lstStyle/>
           <a:p>
             <a:pPr algn="ctr"/>
+            <a:endParaRPr/>
           </a:p>
         </p:txBody>
       </p:sp>
@@ -4353,7 +4462,7 @@
         </p:nvSpPr>
         <p:spPr>
           <a:xfrm>
-            <a:off x="611999" y="2584800"/>
+            <a:off x="611999" y="5241378"/>
             <a:ext cx="2880000" cy="180000"/>
           </a:xfrm>
           <a:prstGeom prst="rect">
@@ -4380,9 +4489,6 @@
                 </a:solidFill>
                 <a:latin typeface="Segoe UI"/>
               </a:defRPr>
-              <a:lnSpc>
-                <a:spcPct val="114999"/>
-              </a:lnSpc>
             </a:pPr>
             <a:r>
               <a:t>12 AI Detection Capabilities / AI检测能力覆盖</a:t>
@@ -4398,7 +4504,7 @@
         </p:nvSpPr>
         <p:spPr>
           <a:xfrm>
-            <a:off x="360000" y="2790000"/>
+            <a:off x="360000" y="5446578"/>
             <a:ext cx="2880000" cy="7200"/>
           </a:xfrm>
           <a:prstGeom prst="rect">
@@ -4432,6 +4538,7 @@
           <a:lstStyle/>
           <a:p>
             <a:pPr algn="ctr"/>
+            <a:endParaRPr/>
           </a:p>
         </p:txBody>
       </p:sp>
@@ -4443,8 +4550,8 @@
         </p:nvSpPr>
         <p:spPr>
           <a:xfrm>
-            <a:off x="360000" y="2844000"/>
-            <a:ext cx="125999" cy="125999"/>
+            <a:off x="360000" y="5500577"/>
+            <a:ext cx="125999" cy="126000"/>
           </a:xfrm>
           <a:prstGeom prst="roundRect">
             <a:avLst/>
@@ -4477,6 +4584,7 @@
           <a:lstStyle/>
           <a:p>
             <a:pPr algn="ctr"/>
+            <a:endParaRPr/>
           </a:p>
         </p:txBody>
       </p:sp>
@@ -4488,8 +4596,8 @@
         </p:nvSpPr>
         <p:spPr>
           <a:xfrm>
-            <a:off x="540000" y="2808000"/>
-            <a:ext cx="792000" cy="125999"/>
+            <a:off x="540000" y="5464577"/>
+            <a:ext cx="792000" cy="126000"/>
           </a:xfrm>
           <a:prstGeom prst="rect">
             <a:avLst/>
@@ -4515,9 +4623,6 @@
                 </a:solidFill>
                 <a:latin typeface="Segoe UI"/>
               </a:defRPr>
-              <a:lnSpc>
-                <a:spcPct val="114999"/>
-              </a:lnSpc>
             </a:pPr>
             <a:r>
               <a:t>No Hard Hat</a:t>
@@ -4533,7 +4638,7 @@
         </p:nvSpPr>
         <p:spPr>
           <a:xfrm>
-            <a:off x="540000" y="2923200"/>
+            <a:off x="540000" y="5579778"/>
             <a:ext cx="432000" cy="90000"/>
           </a:xfrm>
           <a:prstGeom prst="rect">
@@ -4560,13 +4665,12 @@
                 </a:solidFill>
                 <a:latin typeface="Segoe UI"/>
               </a:defRPr>
-              <a:lnSpc>
-                <a:spcPct val="114999"/>
-              </a:lnSpc>
-            </a:pPr>
-            <a:r>
+            </a:pPr>
+            <a:r>
+              <a:rPr dirty="0" err="1"/>
               <a:t>安全帽未佩戴</a:t>
             </a:r>
+            <a:endParaRPr dirty="0"/>
           </a:p>
         </p:txBody>
       </p:sp>
@@ -4578,8 +4682,8 @@
         </p:nvSpPr>
         <p:spPr>
           <a:xfrm>
-            <a:off x="1080000" y="2826000"/>
-            <a:ext cx="251999" cy="162000"/>
+            <a:off x="1080000" y="5482578"/>
+            <a:ext cx="251999" cy="162001"/>
           </a:xfrm>
           <a:prstGeom prst="roundRect">
             <a:avLst/>
@@ -4612,6 +4716,7 @@
           <a:lstStyle/>
           <a:p>
             <a:pPr algn="ctr"/>
+            <a:endParaRPr/>
           </a:p>
         </p:txBody>
       </p:sp>
@@ -4623,8 +4728,8 @@
         </p:nvSpPr>
         <p:spPr>
           <a:xfrm>
-            <a:off x="1080000" y="2826000"/>
-            <a:ext cx="251999" cy="162000"/>
+            <a:off x="1080000" y="5482578"/>
+            <a:ext cx="251999" cy="162001"/>
           </a:xfrm>
           <a:prstGeom prst="rect">
             <a:avLst/>
@@ -4650,9 +4755,6 @@
                 </a:solidFill>
                 <a:latin typeface="Segoe UI"/>
               </a:defRPr>
-              <a:lnSpc>
-                <a:spcPct val="114999"/>
-              </a:lnSpc>
             </a:pPr>
             <a:r>
               <a:t>行为</a:t>
@@ -4668,8 +4770,8 @@
         </p:nvSpPr>
         <p:spPr>
           <a:xfrm>
-            <a:off x="1494000" y="2844000"/>
-            <a:ext cx="125999" cy="125999"/>
+            <a:off x="1494000" y="5500577"/>
+            <a:ext cx="125999" cy="126000"/>
           </a:xfrm>
           <a:prstGeom prst="roundRect">
             <a:avLst/>
@@ -4702,6 +4804,7 @@
           <a:lstStyle/>
           <a:p>
             <a:pPr algn="ctr"/>
+            <a:endParaRPr/>
           </a:p>
         </p:txBody>
       </p:sp>
@@ -4713,8 +4816,8 @@
         </p:nvSpPr>
         <p:spPr>
           <a:xfrm>
-            <a:off x="1674000" y="2808000"/>
-            <a:ext cx="792000" cy="125999"/>
+            <a:off x="1674000" y="5464577"/>
+            <a:ext cx="792000" cy="126000"/>
           </a:xfrm>
           <a:prstGeom prst="rect">
             <a:avLst/>
@@ -4740,9 +4843,6 @@
                 </a:solidFill>
                 <a:latin typeface="Segoe UI"/>
               </a:defRPr>
-              <a:lnSpc>
-                <a:spcPct val="114999"/>
-              </a:lnSpc>
             </a:pPr>
             <a:r>
               <a:t>No Safety Vest</a:t>
@@ -4758,7 +4858,7 @@
         </p:nvSpPr>
         <p:spPr>
           <a:xfrm>
-            <a:off x="1674000" y="2923200"/>
+            <a:off x="1674000" y="5579778"/>
             <a:ext cx="432000" cy="90000"/>
           </a:xfrm>
           <a:prstGeom prst="rect">
@@ -4785,9 +4885,6 @@
                 </a:solidFill>
                 <a:latin typeface="Segoe UI"/>
               </a:defRPr>
-              <a:lnSpc>
-                <a:spcPct val="114999"/>
-              </a:lnSpc>
             </a:pPr>
             <a:r>
               <a:t>反光衣未穿</a:t>
@@ -4803,8 +4900,8 @@
         </p:nvSpPr>
         <p:spPr>
           <a:xfrm>
-            <a:off x="2214000" y="2826000"/>
-            <a:ext cx="251999" cy="162000"/>
+            <a:off x="2214000" y="5482578"/>
+            <a:ext cx="251999" cy="162001"/>
           </a:xfrm>
           <a:prstGeom prst="roundRect">
             <a:avLst/>
@@ -4837,6 +4934,7 @@
           <a:lstStyle/>
           <a:p>
             <a:pPr algn="ctr"/>
+            <a:endParaRPr/>
           </a:p>
         </p:txBody>
       </p:sp>
@@ -4848,8 +4946,8 @@
         </p:nvSpPr>
         <p:spPr>
           <a:xfrm>
-            <a:off x="2214000" y="2826000"/>
-            <a:ext cx="251999" cy="162000"/>
+            <a:off x="2214000" y="5482578"/>
+            <a:ext cx="251999" cy="162001"/>
           </a:xfrm>
           <a:prstGeom prst="rect">
             <a:avLst/>
@@ -4875,9 +4973,6 @@
                 </a:solidFill>
                 <a:latin typeface="Segoe UI"/>
               </a:defRPr>
-              <a:lnSpc>
-                <a:spcPct val="114999"/>
-              </a:lnSpc>
             </a:pPr>
             <a:r>
               <a:t>行为</a:t>
@@ -4893,8 +4988,8 @@
         </p:nvSpPr>
         <p:spPr>
           <a:xfrm>
-            <a:off x="2628000" y="2844000"/>
-            <a:ext cx="125999" cy="125999"/>
+            <a:off x="2628000" y="5500577"/>
+            <a:ext cx="125999" cy="126000"/>
           </a:xfrm>
           <a:prstGeom prst="roundRect">
             <a:avLst/>
@@ -4927,6 +5022,7 @@
           <a:lstStyle/>
           <a:p>
             <a:pPr algn="ctr"/>
+            <a:endParaRPr/>
           </a:p>
         </p:txBody>
       </p:sp>
@@ -4938,8 +5034,8 @@
         </p:nvSpPr>
         <p:spPr>
           <a:xfrm>
-            <a:off x="2808000" y="2808000"/>
-            <a:ext cx="792000" cy="125999"/>
+            <a:off x="2808000" y="5464577"/>
+            <a:ext cx="792000" cy="126000"/>
           </a:xfrm>
           <a:prstGeom prst="rect">
             <a:avLst/>
@@ -4965,9 +5061,6 @@
                 </a:solidFill>
                 <a:latin typeface="Segoe UI"/>
               </a:defRPr>
-              <a:lnSpc>
-                <a:spcPct val="114999"/>
-              </a:lnSpc>
             </a:pPr>
             <a:r>
               <a:t>Edge Protection</a:t>
@@ -4983,7 +5076,7 @@
         </p:nvSpPr>
         <p:spPr>
           <a:xfrm>
-            <a:off x="2808000" y="2923200"/>
+            <a:off x="2808000" y="5579778"/>
             <a:ext cx="432000" cy="90000"/>
           </a:xfrm>
           <a:prstGeom prst="rect">
@@ -5010,9 +5103,6 @@
                 </a:solidFill>
                 <a:latin typeface="Segoe UI"/>
               </a:defRPr>
-              <a:lnSpc>
-                <a:spcPct val="114999"/>
-              </a:lnSpc>
             </a:pPr>
             <a:r>
               <a:t>临边防护缺失</a:t>
@@ -5028,8 +5118,8 @@
         </p:nvSpPr>
         <p:spPr>
           <a:xfrm>
-            <a:off x="3348000" y="2826000"/>
-            <a:ext cx="251999" cy="162000"/>
+            <a:off x="3348000" y="5482578"/>
+            <a:ext cx="251999" cy="162001"/>
           </a:xfrm>
           <a:prstGeom prst="roundRect">
             <a:avLst/>
@@ -5062,6 +5152,7 @@
           <a:lstStyle/>
           <a:p>
             <a:pPr algn="ctr"/>
+            <a:endParaRPr/>
           </a:p>
         </p:txBody>
       </p:sp>
@@ -5073,8 +5164,8 @@
         </p:nvSpPr>
         <p:spPr>
           <a:xfrm>
-            <a:off x="3348000" y="2826000"/>
-            <a:ext cx="251999" cy="162000"/>
+            <a:off x="3348000" y="5482578"/>
+            <a:ext cx="251999" cy="162001"/>
           </a:xfrm>
           <a:prstGeom prst="rect">
             <a:avLst/>
@@ -5100,9 +5191,6 @@
                 </a:solidFill>
                 <a:latin typeface="Segoe UI"/>
               </a:defRPr>
-              <a:lnSpc>
-                <a:spcPct val="114999"/>
-              </a:lnSpc>
             </a:pPr>
             <a:r>
               <a:t>物</a:t>
@@ -5118,8 +5206,8 @@
         </p:nvSpPr>
         <p:spPr>
           <a:xfrm>
-            <a:off x="3761999" y="2844000"/>
-            <a:ext cx="125999" cy="125999"/>
+            <a:off x="6242190" y="5537081"/>
+            <a:ext cx="125999" cy="126000"/>
           </a:xfrm>
           <a:prstGeom prst="roundRect">
             <a:avLst/>
@@ -5152,6 +5240,7 @@
           <a:lstStyle/>
           <a:p>
             <a:pPr algn="ctr"/>
+            <a:endParaRPr/>
           </a:p>
         </p:txBody>
       </p:sp>
@@ -5163,8 +5252,8 @@
         </p:nvSpPr>
         <p:spPr>
           <a:xfrm>
-            <a:off x="3941999" y="2808000"/>
-            <a:ext cx="792000" cy="125999"/>
+            <a:off x="6479675" y="5456080"/>
+            <a:ext cx="608513" cy="192360"/>
           </a:xfrm>
           <a:prstGeom prst="rect">
             <a:avLst/>
@@ -5190,11 +5279,9 @@
                 </a:solidFill>
                 <a:latin typeface="Segoe UI"/>
               </a:defRPr>
-              <a:lnSpc>
-                <a:spcPct val="114999"/>
-              </a:lnSpc>
-            </a:pPr>
-            <a:r>
+            </a:pPr>
+            <a:r>
+              <a:rPr dirty="0"/>
               <a:t>Smoking</a:t>
             </a:r>
           </a:p>
@@ -5208,7 +5295,183 @@
         </p:nvSpPr>
         <p:spPr>
           <a:xfrm>
-            <a:off x="3941999" y="2923200"/>
+            <a:off x="6479675" y="5571281"/>
+            <a:ext cx="565650" cy="169277"/>
+          </a:xfrm>
+          <a:prstGeom prst="rect">
+            <a:avLst/>
+          </a:prstGeom>
+          <a:noFill/>
+        </p:spPr>
+        <p:txBody>
+          <a:bodyPr wrap="square">
+            <a:spAutoFit/>
+          </a:bodyPr>
+          <a:lstStyle/>
+          <a:p>
+            <a:pPr algn="l">
+              <a:spcBef>
+                <a:spcPts val="0"/>
+              </a:spcBef>
+              <a:spcAft>
+                <a:spcPts val="0"/>
+              </a:spcAft>
+              <a:defRPr sz="500" b="0">
+                <a:solidFill>
+                  <a:srgbClr val="94A3B8"/>
+                </a:solidFill>
+                <a:latin typeface="Segoe UI"/>
+              </a:defRPr>
+            </a:pPr>
+            <a:r>
+              <a:rPr dirty="0" err="1"/>
+              <a:t>吸烟检测</a:t>
+            </a:r>
+            <a:endParaRPr dirty="0"/>
+          </a:p>
+        </p:txBody>
+      </p:sp>
+      <p:sp>
+        <p:nvSpPr>
+          <p:cNvPr id="49" name="TextBox 48"/>
+          <p:cNvSpPr txBox="1"/>
+          <p:nvPr/>
+        </p:nvSpPr>
+        <p:spPr>
+          <a:xfrm>
+            <a:off x="7004753" y="5530737"/>
+            <a:ext cx="305998" cy="162001"/>
+          </a:xfrm>
+          <a:prstGeom prst="rect">
+            <a:avLst/>
+          </a:prstGeom>
+          <a:noFill/>
+        </p:spPr>
+        <p:txBody>
+          <a:bodyPr wrap="square">
+            <a:spAutoFit/>
+          </a:bodyPr>
+          <a:lstStyle/>
+          <a:p>
+            <a:pPr algn="ctr">
+              <a:spcBef>
+                <a:spcPts val="0"/>
+              </a:spcBef>
+              <a:spcAft>
+                <a:spcPts val="0"/>
+              </a:spcAft>
+              <a:defRPr sz="450" b="0">
+                <a:solidFill>
+                  <a:srgbClr val="1E40AF"/>
+                </a:solidFill>
+                <a:latin typeface="Segoe UI"/>
+              </a:defRPr>
+            </a:pPr>
+            <a:r>
+              <a:rPr dirty="0" err="1"/>
+              <a:t>行为</a:t>
+            </a:r>
+            <a:endParaRPr dirty="0"/>
+          </a:p>
+        </p:txBody>
+      </p:sp>
+      <p:sp>
+        <p:nvSpPr>
+          <p:cNvPr id="50" name="Rounded Rectangle 49"/>
+          <p:cNvSpPr/>
+          <p:nvPr/>
+        </p:nvSpPr>
+        <p:spPr>
+          <a:xfrm>
+            <a:off x="359999" y="6407912"/>
+            <a:ext cx="125999" cy="126000"/>
+          </a:xfrm>
+          <a:prstGeom prst="roundRect">
+            <a:avLst/>
+          </a:prstGeom>
+          <a:solidFill>
+            <a:srgbClr val="60A5FA"/>
+          </a:solidFill>
+          <a:ln w="12700">
+            <a:solidFill>
+              <a:srgbClr val="60A5FA"/>
+            </a:solidFill>
+          </a:ln>
+        </p:spPr>
+        <p:style>
+          <a:lnRef idx="1">
+            <a:schemeClr val="accent1"/>
+          </a:lnRef>
+          <a:fillRef idx="3">
+            <a:schemeClr val="accent1"/>
+          </a:fillRef>
+          <a:effectRef idx="2">
+            <a:schemeClr val="accent1"/>
+          </a:effectRef>
+          <a:fontRef idx="minor">
+            <a:schemeClr val="lt1"/>
+          </a:fontRef>
+        </p:style>
+        <p:txBody>
+          <a:bodyPr rtlCol="0" anchor="ctr"/>
+          <a:lstStyle/>
+          <a:p>
+            <a:pPr algn="ctr"/>
+            <a:endParaRPr/>
+          </a:p>
+        </p:txBody>
+      </p:sp>
+      <p:sp>
+        <p:nvSpPr>
+          <p:cNvPr id="51" name="TextBox 50"/>
+          <p:cNvSpPr txBox="1"/>
+          <p:nvPr/>
+        </p:nvSpPr>
+        <p:spPr>
+          <a:xfrm>
+            <a:off x="539999" y="6371912"/>
+            <a:ext cx="792000" cy="126000"/>
+          </a:xfrm>
+          <a:prstGeom prst="rect">
+            <a:avLst/>
+          </a:prstGeom>
+          <a:noFill/>
+        </p:spPr>
+        <p:txBody>
+          <a:bodyPr wrap="square">
+            <a:spAutoFit/>
+          </a:bodyPr>
+          <a:lstStyle/>
+          <a:p>
+            <a:pPr algn="l">
+              <a:spcBef>
+                <a:spcPts val="0"/>
+              </a:spcBef>
+              <a:spcAft>
+                <a:spcPts val="0"/>
+              </a:spcAft>
+              <a:defRPr sz="650" b="1">
+                <a:solidFill>
+                  <a:srgbClr val="1E293B"/>
+                </a:solidFill>
+                <a:latin typeface="Segoe UI"/>
+              </a:defRPr>
+            </a:pPr>
+            <a:r>
+              <a:t>Intrusion</a:t>
+            </a:r>
+          </a:p>
+        </p:txBody>
+      </p:sp>
+      <p:sp>
+        <p:nvSpPr>
+          <p:cNvPr id="52" name="TextBox 51"/>
+          <p:cNvSpPr txBox="1"/>
+          <p:nvPr/>
+        </p:nvSpPr>
+        <p:spPr>
+          <a:xfrm>
+            <a:off x="539999" y="6487113"/>
             <a:ext cx="432000" cy="90000"/>
           </a:xfrm>
           <a:prstGeom prst="rect">
@@ -5235,26 +5498,23 @@
                 </a:solidFill>
                 <a:latin typeface="Segoe UI"/>
               </a:defRPr>
-              <a:lnSpc>
-                <a:spcPct val="114999"/>
-              </a:lnSpc>
-            </a:pPr>
-            <a:r>
-              <a:t>吸烟检测</a:t>
-            </a:r>
-          </a:p>
-        </p:txBody>
-      </p:sp>
-      <p:sp>
-        <p:nvSpPr>
-          <p:cNvPr id="48" name="Rounded Rectangle 47"/>
+            </a:pPr>
+            <a:r>
+              <a:t>人员越界</a:t>
+            </a:r>
+          </a:p>
+        </p:txBody>
+      </p:sp>
+      <p:sp>
+        <p:nvSpPr>
+          <p:cNvPr id="53" name="Rounded Rectangle 52"/>
           <p:cNvSpPr/>
           <p:nvPr/>
         </p:nvSpPr>
         <p:spPr>
           <a:xfrm>
-            <a:off x="4481999" y="2826000"/>
-            <a:ext cx="251999" cy="162000"/>
+            <a:off x="1079999" y="6389913"/>
+            <a:ext cx="251999" cy="162001"/>
           </a:xfrm>
           <a:prstGeom prst="roundRect">
             <a:avLst/>
@@ -5287,19 +5547,20 @@
           <a:lstStyle/>
           <a:p>
             <a:pPr algn="ctr"/>
-          </a:p>
-        </p:txBody>
-      </p:sp>
-      <p:sp>
-        <p:nvSpPr>
-          <p:cNvPr id="49" name="TextBox 48"/>
-          <p:cNvSpPr txBox="1"/>
-          <p:nvPr/>
-        </p:nvSpPr>
-        <p:spPr>
-          <a:xfrm>
-            <a:off x="4481999" y="2826000"/>
-            <a:ext cx="251999" cy="162000"/>
+            <a:endParaRPr/>
+          </a:p>
+        </p:txBody>
+      </p:sp>
+      <p:sp>
+        <p:nvSpPr>
+          <p:cNvPr id="54" name="TextBox 53"/>
+          <p:cNvSpPr txBox="1"/>
+          <p:nvPr/>
+        </p:nvSpPr>
+        <p:spPr>
+          <a:xfrm>
+            <a:off x="1079999" y="6389913"/>
+            <a:ext cx="251999" cy="162001"/>
           </a:xfrm>
           <a:prstGeom prst="rect">
             <a:avLst/>
@@ -5325,9 +5586,6 @@
                 </a:solidFill>
                 <a:latin typeface="Segoe UI"/>
               </a:defRPr>
-              <a:lnSpc>
-                <a:spcPct val="114999"/>
-              </a:lnSpc>
             </a:pPr>
             <a:r>
               <a:t>行为</a:t>
@@ -5337,24 +5595,24 @@
       </p:sp>
       <p:sp>
         <p:nvSpPr>
-          <p:cNvPr id="50" name="Rounded Rectangle 49"/>
+          <p:cNvPr id="55" name="Rounded Rectangle 54"/>
           <p:cNvSpPr/>
           <p:nvPr/>
         </p:nvSpPr>
         <p:spPr>
           <a:xfrm>
-            <a:off x="4896000" y="2844000"/>
-            <a:ext cx="125999" cy="125999"/>
+            <a:off x="1493999" y="6407912"/>
+            <a:ext cx="125999" cy="126000"/>
           </a:xfrm>
           <a:prstGeom prst="roundRect">
             <a:avLst/>
           </a:prstGeom>
           <a:solidFill>
-            <a:srgbClr val="60A5FA"/>
+            <a:srgbClr val="A78BFA"/>
           </a:solidFill>
           <a:ln w="12700">
             <a:solidFill>
-              <a:srgbClr val="60A5FA"/>
+              <a:srgbClr val="A78BFA"/>
             </a:solidFill>
           </a:ln>
         </p:spPr>
@@ -5377,19 +5635,20 @@
           <a:lstStyle/>
           <a:p>
             <a:pPr algn="ctr"/>
-          </a:p>
-        </p:txBody>
-      </p:sp>
-      <p:sp>
-        <p:nvSpPr>
-          <p:cNvPr id="51" name="TextBox 50"/>
-          <p:cNvSpPr txBox="1"/>
-          <p:nvPr/>
-        </p:nvSpPr>
-        <p:spPr>
-          <a:xfrm>
-            <a:off x="5076000" y="2808000"/>
-            <a:ext cx="792000" cy="125999"/>
+            <a:endParaRPr/>
+          </a:p>
+        </p:txBody>
+      </p:sp>
+      <p:sp>
+        <p:nvSpPr>
+          <p:cNvPr id="56" name="TextBox 55"/>
+          <p:cNvSpPr txBox="1"/>
+          <p:nvPr/>
+        </p:nvSpPr>
+        <p:spPr>
+          <a:xfrm>
+            <a:off x="1673999" y="6371912"/>
+            <a:ext cx="792000" cy="126000"/>
           </a:xfrm>
           <a:prstGeom prst="rect">
             <a:avLst/>
@@ -5415,25 +5674,22 @@
                 </a:solidFill>
                 <a:latin typeface="Segoe UI"/>
               </a:defRPr>
-              <a:lnSpc>
-                <a:spcPct val="114999"/>
-              </a:lnSpc>
-            </a:pPr>
-            <a:r>
-              <a:t>Intrusion</a:t>
-            </a:r>
-          </a:p>
-        </p:txBody>
-      </p:sp>
-      <p:sp>
-        <p:nvSpPr>
-          <p:cNvPr id="52" name="TextBox 51"/>
-          <p:cNvSpPr txBox="1"/>
-          <p:nvPr/>
-        </p:nvSpPr>
-        <p:spPr>
-          <a:xfrm>
-            <a:off x="5076000" y="2923200"/>
+            </a:pPr>
+            <a:r>
+              <a:t>Pit Overload</a:t>
+            </a:r>
+          </a:p>
+        </p:txBody>
+      </p:sp>
+      <p:sp>
+        <p:nvSpPr>
+          <p:cNvPr id="57" name="TextBox 56"/>
+          <p:cNvSpPr txBox="1"/>
+          <p:nvPr/>
+        </p:nvSpPr>
+        <p:spPr>
+          <a:xfrm>
+            <a:off x="1673999" y="6487113"/>
             <a:ext cx="432000" cy="90000"/>
           </a:xfrm>
           <a:prstGeom prst="rect">
@@ -5460,26 +5716,243 @@
                 </a:solidFill>
                 <a:latin typeface="Segoe UI"/>
               </a:defRPr>
-              <a:lnSpc>
-                <a:spcPct val="114999"/>
-              </a:lnSpc>
-            </a:pPr>
-            <a:r>
-              <a:t>人员越界</a:t>
-            </a:r>
-          </a:p>
-        </p:txBody>
-      </p:sp>
-      <p:sp>
-        <p:nvSpPr>
-          <p:cNvPr id="53" name="Rounded Rectangle 52"/>
+            </a:pPr>
+            <a:r>
+              <a:t>坑边堆载</a:t>
+            </a:r>
+          </a:p>
+        </p:txBody>
+      </p:sp>
+      <p:sp>
+        <p:nvSpPr>
+          <p:cNvPr id="58" name="Rounded Rectangle 57"/>
           <p:cNvSpPr/>
           <p:nvPr/>
         </p:nvSpPr>
         <p:spPr>
           <a:xfrm>
-            <a:off x="5616000" y="2826000"/>
-            <a:ext cx="251999" cy="162000"/>
+            <a:off x="2213999" y="6389913"/>
+            <a:ext cx="251999" cy="162001"/>
+          </a:xfrm>
+          <a:prstGeom prst="roundRect">
+            <a:avLst/>
+          </a:prstGeom>
+          <a:solidFill>
+            <a:srgbClr val="FEF3C7"/>
+          </a:solidFill>
+          <a:ln w="12700">
+            <a:solidFill>
+              <a:srgbClr val="E2E8F0"/>
+            </a:solidFill>
+          </a:ln>
+        </p:spPr>
+        <p:style>
+          <a:lnRef idx="1">
+            <a:schemeClr val="accent1"/>
+          </a:lnRef>
+          <a:fillRef idx="3">
+            <a:schemeClr val="accent1"/>
+          </a:fillRef>
+          <a:effectRef idx="2">
+            <a:schemeClr val="accent1"/>
+          </a:effectRef>
+          <a:fontRef idx="minor">
+            <a:schemeClr val="lt1"/>
+          </a:fontRef>
+        </p:style>
+        <p:txBody>
+          <a:bodyPr rtlCol="0" anchor="ctr"/>
+          <a:lstStyle/>
+          <a:p>
+            <a:pPr algn="ctr"/>
+            <a:endParaRPr/>
+          </a:p>
+        </p:txBody>
+      </p:sp>
+      <p:sp>
+        <p:nvSpPr>
+          <p:cNvPr id="59" name="TextBox 58"/>
+          <p:cNvSpPr txBox="1"/>
+          <p:nvPr/>
+        </p:nvSpPr>
+        <p:spPr>
+          <a:xfrm>
+            <a:off x="2213999" y="6389913"/>
+            <a:ext cx="251999" cy="162001"/>
+          </a:xfrm>
+          <a:prstGeom prst="rect">
+            <a:avLst/>
+          </a:prstGeom>
+          <a:noFill/>
+        </p:spPr>
+        <p:txBody>
+          <a:bodyPr wrap="square">
+            <a:spAutoFit/>
+          </a:bodyPr>
+          <a:lstStyle/>
+          <a:p>
+            <a:pPr algn="ctr">
+              <a:spcBef>
+                <a:spcPts val="0"/>
+              </a:spcBef>
+              <a:spcAft>
+                <a:spcPts val="0"/>
+              </a:spcAft>
+              <a:defRPr sz="450" b="0">
+                <a:solidFill>
+                  <a:srgbClr val="92400E"/>
+                </a:solidFill>
+                <a:latin typeface="Segoe UI"/>
+              </a:defRPr>
+            </a:pPr>
+            <a:r>
+              <a:t>物</a:t>
+            </a:r>
+          </a:p>
+        </p:txBody>
+      </p:sp>
+      <p:sp>
+        <p:nvSpPr>
+          <p:cNvPr id="60" name="Rounded Rectangle 59"/>
+          <p:cNvSpPr/>
+          <p:nvPr/>
+        </p:nvSpPr>
+        <p:spPr>
+          <a:xfrm>
+            <a:off x="360000" y="5788577"/>
+            <a:ext cx="125999" cy="126000"/>
+          </a:xfrm>
+          <a:prstGeom prst="roundRect">
+            <a:avLst/>
+          </a:prstGeom>
+          <a:solidFill>
+            <a:srgbClr val="FB923C"/>
+          </a:solidFill>
+          <a:ln w="12700">
+            <a:solidFill>
+              <a:srgbClr val="FB923C"/>
+            </a:solidFill>
+          </a:ln>
+        </p:spPr>
+        <p:style>
+          <a:lnRef idx="1">
+            <a:schemeClr val="accent1"/>
+          </a:lnRef>
+          <a:fillRef idx="3">
+            <a:schemeClr val="accent1"/>
+          </a:fillRef>
+          <a:effectRef idx="2">
+            <a:schemeClr val="accent1"/>
+          </a:effectRef>
+          <a:fontRef idx="minor">
+            <a:schemeClr val="lt1"/>
+          </a:fontRef>
+        </p:style>
+        <p:txBody>
+          <a:bodyPr rtlCol="0" anchor="ctr"/>
+          <a:lstStyle/>
+          <a:p>
+            <a:pPr algn="ctr"/>
+            <a:endParaRPr/>
+          </a:p>
+        </p:txBody>
+      </p:sp>
+      <p:sp>
+        <p:nvSpPr>
+          <p:cNvPr id="61" name="TextBox 60"/>
+          <p:cNvSpPr txBox="1"/>
+          <p:nvPr/>
+        </p:nvSpPr>
+        <p:spPr>
+          <a:xfrm>
+            <a:off x="540000" y="5752577"/>
+            <a:ext cx="792000" cy="126000"/>
+          </a:xfrm>
+          <a:prstGeom prst="rect">
+            <a:avLst/>
+          </a:prstGeom>
+          <a:noFill/>
+        </p:spPr>
+        <p:txBody>
+          <a:bodyPr wrap="square">
+            <a:spAutoFit/>
+          </a:bodyPr>
+          <a:lstStyle/>
+          <a:p>
+            <a:pPr algn="l">
+              <a:spcBef>
+                <a:spcPts val="0"/>
+              </a:spcBef>
+              <a:spcAft>
+                <a:spcPts val="0"/>
+              </a:spcAft>
+              <a:defRPr sz="650" b="1">
+                <a:solidFill>
+                  <a:srgbClr val="1E293B"/>
+                </a:solidFill>
+                <a:latin typeface="Segoe UI"/>
+              </a:defRPr>
+            </a:pPr>
+            <a:r>
+              <a:t>Open Flame</a:t>
+            </a:r>
+          </a:p>
+        </p:txBody>
+      </p:sp>
+      <p:sp>
+        <p:nvSpPr>
+          <p:cNvPr id="62" name="TextBox 61"/>
+          <p:cNvSpPr txBox="1"/>
+          <p:nvPr/>
+        </p:nvSpPr>
+        <p:spPr>
+          <a:xfrm>
+            <a:off x="540000" y="5867778"/>
+            <a:ext cx="432000" cy="90000"/>
+          </a:xfrm>
+          <a:prstGeom prst="rect">
+            <a:avLst/>
+          </a:prstGeom>
+          <a:noFill/>
+        </p:spPr>
+        <p:txBody>
+          <a:bodyPr wrap="square">
+            <a:spAutoFit/>
+          </a:bodyPr>
+          <a:lstStyle/>
+          <a:p>
+            <a:pPr algn="l">
+              <a:spcBef>
+                <a:spcPts val="0"/>
+              </a:spcBef>
+              <a:spcAft>
+                <a:spcPts val="0"/>
+              </a:spcAft>
+              <a:defRPr sz="500" b="0">
+                <a:solidFill>
+                  <a:srgbClr val="94A3B8"/>
+                </a:solidFill>
+                <a:latin typeface="Segoe UI"/>
+              </a:defRPr>
+            </a:pPr>
+            <a:r>
+              <a:rPr dirty="0" err="1"/>
+              <a:t>明火检测</a:t>
+            </a:r>
+            <a:endParaRPr dirty="0"/>
+          </a:p>
+        </p:txBody>
+      </p:sp>
+      <p:sp>
+        <p:nvSpPr>
+          <p:cNvPr id="63" name="Rounded Rectangle 62"/>
+          <p:cNvSpPr/>
+          <p:nvPr/>
+        </p:nvSpPr>
+        <p:spPr>
+          <a:xfrm>
+            <a:off x="1080000" y="5770578"/>
+            <a:ext cx="251999" cy="162001"/>
           </a:xfrm>
           <a:prstGeom prst="roundRect">
             <a:avLst/>
@@ -5512,19 +5985,20 @@
           <a:lstStyle/>
           <a:p>
             <a:pPr algn="ctr"/>
-          </a:p>
-        </p:txBody>
-      </p:sp>
-      <p:sp>
-        <p:nvSpPr>
-          <p:cNvPr id="54" name="TextBox 53"/>
-          <p:cNvSpPr txBox="1"/>
-          <p:nvPr/>
-        </p:nvSpPr>
-        <p:spPr>
-          <a:xfrm>
-            <a:off x="5616000" y="2826000"/>
-            <a:ext cx="251999" cy="162000"/>
+            <a:endParaRPr/>
+          </a:p>
+        </p:txBody>
+      </p:sp>
+      <p:sp>
+        <p:nvSpPr>
+          <p:cNvPr id="64" name="TextBox 63"/>
+          <p:cNvSpPr txBox="1"/>
+          <p:nvPr/>
+        </p:nvSpPr>
+        <p:spPr>
+          <a:xfrm>
+            <a:off x="1080000" y="5770578"/>
+            <a:ext cx="251999" cy="162001"/>
           </a:xfrm>
           <a:prstGeom prst="rect">
             <a:avLst/>
@@ -5550,36 +6024,35 @@
                 </a:solidFill>
                 <a:latin typeface="Segoe UI"/>
               </a:defRPr>
-              <a:lnSpc>
-                <a:spcPct val="114999"/>
-              </a:lnSpc>
-            </a:pPr>
-            <a:r>
+            </a:pPr>
+            <a:r>
+              <a:rPr dirty="0" err="1"/>
               <a:t>行为</a:t>
             </a:r>
-          </a:p>
-        </p:txBody>
-      </p:sp>
-      <p:sp>
-        <p:nvSpPr>
-          <p:cNvPr id="55" name="Rounded Rectangle 54"/>
+            <a:endParaRPr dirty="0"/>
+          </a:p>
+        </p:txBody>
+      </p:sp>
+      <p:sp>
+        <p:nvSpPr>
+          <p:cNvPr id="65" name="Rounded Rectangle 64"/>
           <p:cNvSpPr/>
           <p:nvPr/>
         </p:nvSpPr>
         <p:spPr>
           <a:xfrm>
-            <a:off x="6030000" y="2844000"/>
-            <a:ext cx="125999" cy="125999"/>
+            <a:off x="1494000" y="5788577"/>
+            <a:ext cx="125999" cy="126000"/>
           </a:xfrm>
           <a:prstGeom prst="roundRect">
             <a:avLst/>
           </a:prstGeom>
           <a:solidFill>
-            <a:srgbClr val="A78BFA"/>
+            <a:srgbClr val="FBBF24"/>
           </a:solidFill>
           <a:ln w="12700">
             <a:solidFill>
-              <a:srgbClr val="A78BFA"/>
+              <a:srgbClr val="FBBF24"/>
             </a:solidFill>
           </a:ln>
         </p:spPr>
@@ -5602,19 +6075,20 @@
           <a:lstStyle/>
           <a:p>
             <a:pPr algn="ctr"/>
-          </a:p>
-        </p:txBody>
-      </p:sp>
-      <p:sp>
-        <p:nvSpPr>
-          <p:cNvPr id="56" name="TextBox 55"/>
-          <p:cNvSpPr txBox="1"/>
-          <p:nvPr/>
-        </p:nvSpPr>
-        <p:spPr>
-          <a:xfrm>
-            <a:off x="6210000" y="2808000"/>
-            <a:ext cx="792000" cy="125999"/>
+            <a:endParaRPr/>
+          </a:p>
+        </p:txBody>
+      </p:sp>
+      <p:sp>
+        <p:nvSpPr>
+          <p:cNvPr id="66" name="TextBox 65"/>
+          <p:cNvSpPr txBox="1"/>
+          <p:nvPr/>
+        </p:nvSpPr>
+        <p:spPr>
+          <a:xfrm>
+            <a:off x="1674000" y="5752577"/>
+            <a:ext cx="792000" cy="126000"/>
           </a:xfrm>
           <a:prstGeom prst="rect">
             <a:avLst/>
@@ -5640,25 +6114,22 @@
                 </a:solidFill>
                 <a:latin typeface="Segoe UI"/>
               </a:defRPr>
-              <a:lnSpc>
-                <a:spcPct val="114999"/>
-              </a:lnSpc>
-            </a:pPr>
-            <a:r>
-              <a:t>Pit Overload</a:t>
-            </a:r>
-          </a:p>
-        </p:txBody>
-      </p:sp>
-      <p:sp>
-        <p:nvSpPr>
-          <p:cNvPr id="57" name="TextBox 56"/>
-          <p:cNvSpPr txBox="1"/>
-          <p:nvPr/>
-        </p:nvSpPr>
-        <p:spPr>
-          <a:xfrm>
-            <a:off x="6210000" y="2923200"/>
+            </a:pPr>
+            <a:r>
+              <a:t>Bulk Lifting</a:t>
+            </a:r>
+          </a:p>
+        </p:txBody>
+      </p:sp>
+      <p:sp>
+        <p:nvSpPr>
+          <p:cNvPr id="67" name="TextBox 66"/>
+          <p:cNvSpPr txBox="1"/>
+          <p:nvPr/>
+        </p:nvSpPr>
+        <p:spPr>
+          <a:xfrm>
+            <a:off x="1674000" y="5867778"/>
             <a:ext cx="432000" cy="90000"/>
           </a:xfrm>
           <a:prstGeom prst="rect">
@@ -5685,26 +6156,23 @@
                 </a:solidFill>
                 <a:latin typeface="Segoe UI"/>
               </a:defRPr>
-              <a:lnSpc>
-                <a:spcPct val="114999"/>
-              </a:lnSpc>
-            </a:pPr>
-            <a:r>
-              <a:t>坑边堆载</a:t>
-            </a:r>
-          </a:p>
-        </p:txBody>
-      </p:sp>
-      <p:sp>
-        <p:nvSpPr>
-          <p:cNvPr id="58" name="Rounded Rectangle 57"/>
+            </a:pPr>
+            <a:r>
+              <a:t>散料吊装</a:t>
+            </a:r>
+          </a:p>
+        </p:txBody>
+      </p:sp>
+      <p:sp>
+        <p:nvSpPr>
+          <p:cNvPr id="68" name="Rounded Rectangle 67"/>
           <p:cNvSpPr/>
           <p:nvPr/>
         </p:nvSpPr>
         <p:spPr>
           <a:xfrm>
-            <a:off x="6750000" y="2826000"/>
-            <a:ext cx="251999" cy="162000"/>
+            <a:off x="2214000" y="5770578"/>
+            <a:ext cx="251999" cy="162001"/>
           </a:xfrm>
           <a:prstGeom prst="roundRect">
             <a:avLst/>
@@ -5737,19 +6205,20 @@
           <a:lstStyle/>
           <a:p>
             <a:pPr algn="ctr"/>
-          </a:p>
-        </p:txBody>
-      </p:sp>
-      <p:sp>
-        <p:nvSpPr>
-          <p:cNvPr id="59" name="TextBox 58"/>
-          <p:cNvSpPr txBox="1"/>
-          <p:nvPr/>
-        </p:nvSpPr>
-        <p:spPr>
-          <a:xfrm>
-            <a:off x="6750000" y="2826000"/>
-            <a:ext cx="251999" cy="162000"/>
+            <a:endParaRPr/>
+          </a:p>
+        </p:txBody>
+      </p:sp>
+      <p:sp>
+        <p:nvSpPr>
+          <p:cNvPr id="69" name="TextBox 68"/>
+          <p:cNvSpPr txBox="1"/>
+          <p:nvPr/>
+        </p:nvSpPr>
+        <p:spPr>
+          <a:xfrm>
+            <a:off x="2214000" y="5770578"/>
+            <a:ext cx="251999" cy="162001"/>
           </a:xfrm>
           <a:prstGeom prst="rect">
             <a:avLst/>
@@ -5775,9 +6244,6 @@
                 </a:solidFill>
                 <a:latin typeface="Segoe UI"/>
               </a:defRPr>
-              <a:lnSpc>
-                <a:spcPct val="114999"/>
-              </a:lnSpc>
             </a:pPr>
             <a:r>
               <a:t>物</a:t>
@@ -5787,24 +6253,24 @@
       </p:sp>
       <p:sp>
         <p:nvSpPr>
-          <p:cNvPr id="60" name="Rounded Rectangle 59"/>
+          <p:cNvPr id="70" name="Rounded Rectangle 69"/>
           <p:cNvSpPr/>
           <p:nvPr/>
         </p:nvSpPr>
         <p:spPr>
           <a:xfrm>
-            <a:off x="360000" y="3132000"/>
-            <a:ext cx="125999" cy="125999"/>
+            <a:off x="2628000" y="5788577"/>
+            <a:ext cx="125999" cy="126000"/>
           </a:xfrm>
           <a:prstGeom prst="roundRect">
             <a:avLst/>
           </a:prstGeom>
           <a:solidFill>
-            <a:srgbClr val="FB923C"/>
+            <a:srgbClr val="34D399"/>
           </a:solidFill>
           <a:ln w="12700">
             <a:solidFill>
-              <a:srgbClr val="FB923C"/>
+              <a:srgbClr val="34D399"/>
             </a:solidFill>
           </a:ln>
         </p:spPr>
@@ -5827,19 +6293,20 @@
           <a:lstStyle/>
           <a:p>
             <a:pPr algn="ctr"/>
-          </a:p>
-        </p:txBody>
-      </p:sp>
-      <p:sp>
-        <p:nvSpPr>
-          <p:cNvPr id="61" name="TextBox 60"/>
-          <p:cNvSpPr txBox="1"/>
-          <p:nvPr/>
-        </p:nvSpPr>
-        <p:spPr>
-          <a:xfrm>
-            <a:off x="540000" y="3096000"/>
-            <a:ext cx="792000" cy="125999"/>
+            <a:endParaRPr/>
+          </a:p>
+        </p:txBody>
+      </p:sp>
+      <p:sp>
+        <p:nvSpPr>
+          <p:cNvPr id="71" name="TextBox 70"/>
+          <p:cNvSpPr txBox="1"/>
+          <p:nvPr/>
+        </p:nvSpPr>
+        <p:spPr>
+          <a:xfrm>
+            <a:off x="2808000" y="5752577"/>
+            <a:ext cx="792000" cy="126000"/>
           </a:xfrm>
           <a:prstGeom prst="rect">
             <a:avLst/>
@@ -5865,26 +6332,23 @@
                 </a:solidFill>
                 <a:latin typeface="Segoe UI"/>
               </a:defRPr>
-              <a:lnSpc>
-                <a:spcPct val="114999"/>
-              </a:lnSpc>
-            </a:pPr>
-            <a:r>
-              <a:t>Open Flame</a:t>
-            </a:r>
-          </a:p>
-        </p:txBody>
-      </p:sp>
-      <p:sp>
-        <p:nvSpPr>
-          <p:cNvPr id="62" name="TextBox 61"/>
-          <p:cNvSpPr txBox="1"/>
-          <p:nvPr/>
-        </p:nvSpPr>
-        <p:spPr>
-          <a:xfrm>
-            <a:off x="540000" y="3211200"/>
-            <a:ext cx="432000" cy="90000"/>
+            </a:pPr>
+            <a:r>
+              <a:t>Crowd Gather</a:t>
+            </a:r>
+          </a:p>
+        </p:txBody>
+      </p:sp>
+      <p:sp>
+        <p:nvSpPr>
+          <p:cNvPr id="72" name="TextBox 71"/>
+          <p:cNvSpPr txBox="1"/>
+          <p:nvPr/>
+        </p:nvSpPr>
+        <p:spPr>
+          <a:xfrm>
+            <a:off x="2808000" y="5867778"/>
+            <a:ext cx="432000" cy="246221"/>
           </a:xfrm>
           <a:prstGeom prst="rect">
             <a:avLst/>
@@ -5910,26 +6374,25 @@
                 </a:solidFill>
                 <a:latin typeface="Segoe UI"/>
               </a:defRPr>
-              <a:lnSpc>
-                <a:spcPct val="114999"/>
-              </a:lnSpc>
-            </a:pPr>
-            <a:r>
-              <a:t>明火检测</a:t>
-            </a:r>
-          </a:p>
-        </p:txBody>
-      </p:sp>
-      <p:sp>
-        <p:nvSpPr>
-          <p:cNvPr id="63" name="Rounded Rectangle 62"/>
+            </a:pPr>
+            <a:r>
+              <a:rPr dirty="0" err="1"/>
+              <a:t>人员聚集</a:t>
+            </a:r>
+            <a:endParaRPr dirty="0"/>
+          </a:p>
+        </p:txBody>
+      </p:sp>
+      <p:sp>
+        <p:nvSpPr>
+          <p:cNvPr id="73" name="Rounded Rectangle 72"/>
           <p:cNvSpPr/>
           <p:nvPr/>
         </p:nvSpPr>
         <p:spPr>
           <a:xfrm>
-            <a:off x="1080000" y="3114000"/>
-            <a:ext cx="251999" cy="162000"/>
+            <a:off x="3348000" y="5770578"/>
+            <a:ext cx="251999" cy="162001"/>
           </a:xfrm>
           <a:prstGeom prst="roundRect">
             <a:avLst/>
@@ -5962,19 +6425,20 @@
           <a:lstStyle/>
           <a:p>
             <a:pPr algn="ctr"/>
-          </a:p>
-        </p:txBody>
-      </p:sp>
-      <p:sp>
-        <p:nvSpPr>
-          <p:cNvPr id="64" name="TextBox 63"/>
-          <p:cNvSpPr txBox="1"/>
-          <p:nvPr/>
-        </p:nvSpPr>
-        <p:spPr>
-          <a:xfrm>
-            <a:off x="1080000" y="3114000"/>
-            <a:ext cx="251999" cy="162000"/>
+            <a:endParaRPr/>
+          </a:p>
+        </p:txBody>
+      </p:sp>
+      <p:sp>
+        <p:nvSpPr>
+          <p:cNvPr id="74" name="TextBox 73"/>
+          <p:cNvSpPr txBox="1"/>
+          <p:nvPr/>
+        </p:nvSpPr>
+        <p:spPr>
+          <a:xfrm>
+            <a:off x="3348000" y="5770578"/>
+            <a:ext cx="251999" cy="162001"/>
           </a:xfrm>
           <a:prstGeom prst="rect">
             <a:avLst/>
@@ -6000,9 +6464,6 @@
                 </a:solidFill>
                 <a:latin typeface="Segoe UI"/>
               </a:defRPr>
-              <a:lnSpc>
-                <a:spcPct val="114999"/>
-              </a:lnSpc>
             </a:pPr>
             <a:r>
               <a:t>行为</a:t>
@@ -6012,24 +6473,24 @@
       </p:sp>
       <p:sp>
         <p:nvSpPr>
-          <p:cNvPr id="65" name="Rounded Rectangle 64"/>
+          <p:cNvPr id="75" name="Rounded Rectangle 74"/>
           <p:cNvSpPr/>
           <p:nvPr/>
         </p:nvSpPr>
         <p:spPr>
           <a:xfrm>
-            <a:off x="1494000" y="3132000"/>
-            <a:ext cx="125999" cy="125999"/>
+            <a:off x="6247281" y="5854702"/>
+            <a:ext cx="125999" cy="126000"/>
           </a:xfrm>
           <a:prstGeom prst="roundRect">
             <a:avLst/>
           </a:prstGeom>
           <a:solidFill>
-            <a:srgbClr val="FBBF24"/>
+            <a:srgbClr val="818CF8"/>
           </a:solidFill>
           <a:ln w="12700">
             <a:solidFill>
-              <a:srgbClr val="FBBF24"/>
+              <a:srgbClr val="818CF8"/>
             </a:solidFill>
           </a:ln>
         </p:spPr>
@@ -6052,19 +6513,20 @@
           <a:lstStyle/>
           <a:p>
             <a:pPr algn="ctr"/>
-          </a:p>
-        </p:txBody>
-      </p:sp>
-      <p:sp>
-        <p:nvSpPr>
-          <p:cNvPr id="66" name="TextBox 65"/>
-          <p:cNvSpPr txBox="1"/>
-          <p:nvPr/>
-        </p:nvSpPr>
-        <p:spPr>
-          <a:xfrm>
-            <a:off x="1674000" y="3096000"/>
-            <a:ext cx="792000" cy="125999"/>
+            <a:endParaRPr/>
+          </a:p>
+        </p:txBody>
+      </p:sp>
+      <p:sp>
+        <p:nvSpPr>
+          <p:cNvPr id="76" name="TextBox 75"/>
+          <p:cNvSpPr txBox="1"/>
+          <p:nvPr/>
+        </p:nvSpPr>
+        <p:spPr>
+          <a:xfrm>
+            <a:off x="6300933" y="5790122"/>
+            <a:ext cx="959222" cy="192360"/>
           </a:xfrm>
           <a:prstGeom prst="rect">
             <a:avLst/>
@@ -6090,25 +6552,199 @@
                 </a:solidFill>
                 <a:latin typeface="Segoe UI"/>
               </a:defRPr>
-              <a:lnSpc>
-                <a:spcPct val="114999"/>
-              </a:lnSpc>
-            </a:pPr>
-            <a:r>
-              <a:t>Bulk Lifting</a:t>
-            </a:r>
-          </a:p>
-        </p:txBody>
-      </p:sp>
-      <p:sp>
-        <p:nvSpPr>
-          <p:cNvPr id="67" name="TextBox 66"/>
-          <p:cNvSpPr txBox="1"/>
-          <p:nvPr/>
-        </p:nvSpPr>
-        <p:spPr>
-          <a:xfrm>
-            <a:off x="1674000" y="3211200"/>
+            </a:pPr>
+            <a:r>
+              <a:rPr dirty="0"/>
+              <a:t>Vehicle Violation</a:t>
+            </a:r>
+          </a:p>
+        </p:txBody>
+      </p:sp>
+      <p:sp>
+        <p:nvSpPr>
+          <p:cNvPr id="77" name="TextBox 76"/>
+          <p:cNvSpPr txBox="1"/>
+          <p:nvPr/>
+        </p:nvSpPr>
+        <p:spPr>
+          <a:xfrm>
+            <a:off x="6479674" y="5905323"/>
+            <a:ext cx="720325" cy="169277"/>
+          </a:xfrm>
+          <a:prstGeom prst="rect">
+            <a:avLst/>
+          </a:prstGeom>
+          <a:noFill/>
+        </p:spPr>
+        <p:txBody>
+          <a:bodyPr wrap="square">
+            <a:spAutoFit/>
+          </a:bodyPr>
+          <a:lstStyle/>
+          <a:p>
+            <a:pPr algn="l">
+              <a:spcBef>
+                <a:spcPts val="0"/>
+              </a:spcBef>
+              <a:spcAft>
+                <a:spcPts val="0"/>
+              </a:spcAft>
+              <a:defRPr sz="500" b="0">
+                <a:solidFill>
+                  <a:srgbClr val="94A3B8"/>
+                </a:solidFill>
+                <a:latin typeface="Segoe UI"/>
+              </a:defRPr>
+            </a:pPr>
+            <a:r>
+              <a:rPr dirty="0" err="1"/>
+              <a:t>车辆违规</a:t>
+            </a:r>
+            <a:endParaRPr dirty="0"/>
+          </a:p>
+        </p:txBody>
+      </p:sp>
+      <p:sp>
+        <p:nvSpPr>
+          <p:cNvPr id="79" name="TextBox 78"/>
+          <p:cNvSpPr txBox="1"/>
+          <p:nvPr/>
+        </p:nvSpPr>
+        <p:spPr>
+          <a:xfrm>
+            <a:off x="7019663" y="5854702"/>
+            <a:ext cx="305998" cy="161583"/>
+          </a:xfrm>
+          <a:prstGeom prst="rect">
+            <a:avLst/>
+          </a:prstGeom>
+          <a:noFill/>
+        </p:spPr>
+        <p:txBody>
+          <a:bodyPr wrap="square">
+            <a:spAutoFit/>
+          </a:bodyPr>
+          <a:lstStyle/>
+          <a:p>
+            <a:pPr algn="ctr">
+              <a:spcBef>
+                <a:spcPts val="0"/>
+              </a:spcBef>
+              <a:spcAft>
+                <a:spcPts val="0"/>
+              </a:spcAft>
+              <a:defRPr sz="450" b="0">
+                <a:solidFill>
+                  <a:srgbClr val="1E40AF"/>
+                </a:solidFill>
+                <a:latin typeface="Segoe UI"/>
+              </a:defRPr>
+            </a:pPr>
+            <a:r>
+              <a:rPr dirty="0" err="1"/>
+              <a:t>行为</a:t>
+            </a:r>
+            <a:endParaRPr dirty="0"/>
+          </a:p>
+        </p:txBody>
+      </p:sp>
+      <p:sp>
+        <p:nvSpPr>
+          <p:cNvPr id="80" name="Rounded Rectangle 79"/>
+          <p:cNvSpPr/>
+          <p:nvPr/>
+        </p:nvSpPr>
+        <p:spPr>
+          <a:xfrm>
+            <a:off x="2628000" y="6407912"/>
+            <a:ext cx="125999" cy="126000"/>
+          </a:xfrm>
+          <a:prstGeom prst="roundRect">
+            <a:avLst/>
+          </a:prstGeom>
+          <a:solidFill>
+            <a:srgbClr val="9CA3AF"/>
+          </a:solidFill>
+          <a:ln w="12700">
+            <a:solidFill>
+              <a:srgbClr val="9CA3AF"/>
+            </a:solidFill>
+          </a:ln>
+        </p:spPr>
+        <p:style>
+          <a:lnRef idx="1">
+            <a:schemeClr val="accent1"/>
+          </a:lnRef>
+          <a:fillRef idx="3">
+            <a:schemeClr val="accent1"/>
+          </a:fillRef>
+          <a:effectRef idx="2">
+            <a:schemeClr val="accent1"/>
+          </a:effectRef>
+          <a:fontRef idx="minor">
+            <a:schemeClr val="lt1"/>
+          </a:fontRef>
+        </p:style>
+        <p:txBody>
+          <a:bodyPr rtlCol="0" anchor="ctr"/>
+          <a:lstStyle/>
+          <a:p>
+            <a:pPr algn="ctr"/>
+            <a:endParaRPr/>
+          </a:p>
+        </p:txBody>
+      </p:sp>
+      <p:sp>
+        <p:nvSpPr>
+          <p:cNvPr id="81" name="TextBox 80"/>
+          <p:cNvSpPr txBox="1"/>
+          <p:nvPr/>
+        </p:nvSpPr>
+        <p:spPr>
+          <a:xfrm>
+            <a:off x="2808000" y="6371912"/>
+            <a:ext cx="792000" cy="126000"/>
+          </a:xfrm>
+          <a:prstGeom prst="rect">
+            <a:avLst/>
+          </a:prstGeom>
+          <a:noFill/>
+        </p:spPr>
+        <p:txBody>
+          <a:bodyPr wrap="square">
+            <a:spAutoFit/>
+          </a:bodyPr>
+          <a:lstStyle/>
+          <a:p>
+            <a:pPr algn="l">
+              <a:spcBef>
+                <a:spcPts val="0"/>
+              </a:spcBef>
+              <a:spcAft>
+                <a:spcPts val="0"/>
+              </a:spcAft>
+              <a:defRPr sz="650" b="1">
+                <a:solidFill>
+                  <a:srgbClr val="1E293B"/>
+                </a:solidFill>
+                <a:latin typeface="Segoe UI"/>
+              </a:defRPr>
+            </a:pPr>
+            <a:r>
+              <a:t>Suspended Platform</a:t>
+            </a:r>
+          </a:p>
+        </p:txBody>
+      </p:sp>
+      <p:sp>
+        <p:nvSpPr>
+          <p:cNvPr id="82" name="TextBox 81"/>
+          <p:cNvSpPr txBox="1"/>
+          <p:nvPr/>
+        </p:nvSpPr>
+        <p:spPr>
+          <a:xfrm>
+            <a:off x="2808000" y="6487113"/>
             <a:ext cx="432000" cy="90000"/>
           </a:xfrm>
           <a:prstGeom prst="rect">
@@ -6135,26 +6771,23 @@
                 </a:solidFill>
                 <a:latin typeface="Segoe UI"/>
               </a:defRPr>
-              <a:lnSpc>
-                <a:spcPct val="114999"/>
-              </a:lnSpc>
-            </a:pPr>
-            <a:r>
-              <a:t>散料吊装</a:t>
-            </a:r>
-          </a:p>
-        </p:txBody>
-      </p:sp>
-      <p:sp>
-        <p:nvSpPr>
-          <p:cNvPr id="68" name="Rounded Rectangle 67"/>
+            </a:pPr>
+            <a:r>
+              <a:t>吊篮作业</a:t>
+            </a:r>
+          </a:p>
+        </p:txBody>
+      </p:sp>
+      <p:sp>
+        <p:nvSpPr>
+          <p:cNvPr id="83" name="Rounded Rectangle 82"/>
           <p:cNvSpPr/>
           <p:nvPr/>
         </p:nvSpPr>
         <p:spPr>
           <a:xfrm>
-            <a:off x="2214000" y="3114000"/>
-            <a:ext cx="251999" cy="162000"/>
+            <a:off x="3348000" y="6389913"/>
+            <a:ext cx="251999" cy="162001"/>
           </a:xfrm>
           <a:prstGeom prst="roundRect">
             <a:avLst/>
@@ -6187,19 +6820,20 @@
           <a:lstStyle/>
           <a:p>
             <a:pPr algn="ctr"/>
-          </a:p>
-        </p:txBody>
-      </p:sp>
-      <p:sp>
-        <p:nvSpPr>
-          <p:cNvPr id="69" name="TextBox 68"/>
-          <p:cNvSpPr txBox="1"/>
-          <p:nvPr/>
-        </p:nvSpPr>
-        <p:spPr>
-          <a:xfrm>
-            <a:off x="2214000" y="3114000"/>
-            <a:ext cx="251999" cy="162000"/>
+            <a:endParaRPr/>
+          </a:p>
+        </p:txBody>
+      </p:sp>
+      <p:sp>
+        <p:nvSpPr>
+          <p:cNvPr id="84" name="TextBox 83"/>
+          <p:cNvSpPr txBox="1"/>
+          <p:nvPr/>
+        </p:nvSpPr>
+        <p:spPr>
+          <a:xfrm>
+            <a:off x="3348000" y="6389913"/>
+            <a:ext cx="251999" cy="162001"/>
           </a:xfrm>
           <a:prstGeom prst="rect">
             <a:avLst/>
@@ -6225,9 +6859,6 @@
                 </a:solidFill>
                 <a:latin typeface="Segoe UI"/>
               </a:defRPr>
-              <a:lnSpc>
-                <a:spcPct val="114999"/>
-              </a:lnSpc>
             </a:pPr>
             <a:r>
               <a:t>物</a:t>
@@ -6237,24 +6868,24 @@
       </p:sp>
       <p:sp>
         <p:nvSpPr>
-          <p:cNvPr id="70" name="Rounded Rectangle 69"/>
+          <p:cNvPr id="85" name="Rounded Rectangle 84"/>
           <p:cNvSpPr/>
           <p:nvPr/>
         </p:nvSpPr>
         <p:spPr>
           <a:xfrm>
-            <a:off x="2628000" y="3132000"/>
-            <a:ext cx="125999" cy="125999"/>
+            <a:off x="3762000" y="6407912"/>
+            <a:ext cx="125999" cy="126000"/>
           </a:xfrm>
           <a:prstGeom prst="roundRect">
             <a:avLst/>
           </a:prstGeom>
           <a:solidFill>
-            <a:srgbClr val="34D399"/>
+            <a:srgbClr val="6B7280"/>
           </a:solidFill>
           <a:ln w="12700">
             <a:solidFill>
-              <a:srgbClr val="34D399"/>
+              <a:srgbClr val="6B7280"/>
             </a:solidFill>
           </a:ln>
         </p:spPr>
@@ -6277,19 +6908,20 @@
           <a:lstStyle/>
           <a:p>
             <a:pPr algn="ctr"/>
-          </a:p>
-        </p:txBody>
-      </p:sp>
-      <p:sp>
-        <p:nvSpPr>
-          <p:cNvPr id="71" name="TextBox 70"/>
-          <p:cNvSpPr txBox="1"/>
-          <p:nvPr/>
-        </p:nvSpPr>
-        <p:spPr>
-          <a:xfrm>
-            <a:off x="2808000" y="3096000"/>
-            <a:ext cx="792000" cy="125999"/>
+            <a:endParaRPr/>
+          </a:p>
+        </p:txBody>
+      </p:sp>
+      <p:sp>
+        <p:nvSpPr>
+          <p:cNvPr id="86" name="TextBox 85"/>
+          <p:cNvSpPr txBox="1"/>
+          <p:nvPr/>
+        </p:nvSpPr>
+        <p:spPr>
+          <a:xfrm>
+            <a:off x="3942000" y="6371912"/>
+            <a:ext cx="792000" cy="126000"/>
           </a:xfrm>
           <a:prstGeom prst="rect">
             <a:avLst/>
@@ -6315,25 +6947,22 @@
                 </a:solidFill>
                 <a:latin typeface="Segoe UI"/>
               </a:defRPr>
-              <a:lnSpc>
-                <a:spcPct val="114999"/>
-              </a:lnSpc>
-            </a:pPr>
-            <a:r>
-              <a:t>Crowd Gather</a:t>
-            </a:r>
-          </a:p>
-        </p:txBody>
-      </p:sp>
-      <p:sp>
-        <p:nvSpPr>
-          <p:cNvPr id="72" name="TextBox 71"/>
-          <p:cNvSpPr txBox="1"/>
-          <p:nvPr/>
-        </p:nvSpPr>
-        <p:spPr>
-          <a:xfrm>
-            <a:off x="2808000" y="3211200"/>
+            </a:pPr>
+            <a:r>
+              <a:t>Enclosure Breach</a:t>
+            </a:r>
+          </a:p>
+        </p:txBody>
+      </p:sp>
+      <p:sp>
+        <p:nvSpPr>
+          <p:cNvPr id="87" name="TextBox 86"/>
+          <p:cNvSpPr txBox="1"/>
+          <p:nvPr/>
+        </p:nvSpPr>
+        <p:spPr>
+          <a:xfrm>
+            <a:off x="3942000" y="6487113"/>
             <a:ext cx="432000" cy="90000"/>
           </a:xfrm>
           <a:prstGeom prst="rect">
@@ -6360,476 +6989,23 @@
                 </a:solidFill>
                 <a:latin typeface="Segoe UI"/>
               </a:defRPr>
-              <a:lnSpc>
-                <a:spcPct val="114999"/>
-              </a:lnSpc>
-            </a:pPr>
-            <a:r>
-              <a:t>人员聚集</a:t>
-            </a:r>
-          </a:p>
-        </p:txBody>
-      </p:sp>
-      <p:sp>
-        <p:nvSpPr>
-          <p:cNvPr id="73" name="Rounded Rectangle 72"/>
+            </a:pPr>
+            <a:r>
+              <a:t>工地围挡封闭</a:t>
+            </a:r>
+          </a:p>
+        </p:txBody>
+      </p:sp>
+      <p:sp>
+        <p:nvSpPr>
+          <p:cNvPr id="88" name="Rounded Rectangle 87"/>
           <p:cNvSpPr/>
           <p:nvPr/>
         </p:nvSpPr>
         <p:spPr>
           <a:xfrm>
-            <a:off x="3348000" y="3114000"/>
-            <a:ext cx="251999" cy="162000"/>
-          </a:xfrm>
-          <a:prstGeom prst="roundRect">
-            <a:avLst/>
-          </a:prstGeom>
-          <a:solidFill>
-            <a:srgbClr val="DBEAFE"/>
-          </a:solidFill>
-          <a:ln w="12700">
-            <a:solidFill>
-              <a:srgbClr val="E2E8F0"/>
-            </a:solidFill>
-          </a:ln>
-        </p:spPr>
-        <p:style>
-          <a:lnRef idx="1">
-            <a:schemeClr val="accent1"/>
-          </a:lnRef>
-          <a:fillRef idx="3">
-            <a:schemeClr val="accent1"/>
-          </a:fillRef>
-          <a:effectRef idx="2">
-            <a:schemeClr val="accent1"/>
-          </a:effectRef>
-          <a:fontRef idx="minor">
-            <a:schemeClr val="lt1"/>
-          </a:fontRef>
-        </p:style>
-        <p:txBody>
-          <a:bodyPr rtlCol="0" anchor="ctr"/>
-          <a:lstStyle/>
-          <a:p>
-            <a:pPr algn="ctr"/>
-          </a:p>
-        </p:txBody>
-      </p:sp>
-      <p:sp>
-        <p:nvSpPr>
-          <p:cNvPr id="74" name="TextBox 73"/>
-          <p:cNvSpPr txBox="1"/>
-          <p:nvPr/>
-        </p:nvSpPr>
-        <p:spPr>
-          <a:xfrm>
-            <a:off x="3348000" y="3114000"/>
-            <a:ext cx="251999" cy="162000"/>
-          </a:xfrm>
-          <a:prstGeom prst="rect">
-            <a:avLst/>
-          </a:prstGeom>
-          <a:noFill/>
-        </p:spPr>
-        <p:txBody>
-          <a:bodyPr wrap="square">
-            <a:spAutoFit/>
-          </a:bodyPr>
-          <a:lstStyle/>
-          <a:p>
-            <a:pPr algn="ctr">
-              <a:spcBef>
-                <a:spcPts val="0"/>
-              </a:spcBef>
-              <a:spcAft>
-                <a:spcPts val="0"/>
-              </a:spcAft>
-              <a:defRPr sz="450" b="0">
-                <a:solidFill>
-                  <a:srgbClr val="1E40AF"/>
-                </a:solidFill>
-                <a:latin typeface="Segoe UI"/>
-              </a:defRPr>
-              <a:lnSpc>
-                <a:spcPct val="114999"/>
-              </a:lnSpc>
-            </a:pPr>
-            <a:r>
-              <a:t>行为</a:t>
-            </a:r>
-          </a:p>
-        </p:txBody>
-      </p:sp>
-      <p:sp>
-        <p:nvSpPr>
-          <p:cNvPr id="75" name="Rounded Rectangle 74"/>
-          <p:cNvSpPr/>
-          <p:nvPr/>
-        </p:nvSpPr>
-        <p:spPr>
-          <a:xfrm>
-            <a:off x="3761999" y="3132000"/>
-            <a:ext cx="125999" cy="125999"/>
-          </a:xfrm>
-          <a:prstGeom prst="roundRect">
-            <a:avLst/>
-          </a:prstGeom>
-          <a:solidFill>
-            <a:srgbClr val="818CF8"/>
-          </a:solidFill>
-          <a:ln w="12700">
-            <a:solidFill>
-              <a:srgbClr val="818CF8"/>
-            </a:solidFill>
-          </a:ln>
-        </p:spPr>
-        <p:style>
-          <a:lnRef idx="1">
-            <a:schemeClr val="accent1"/>
-          </a:lnRef>
-          <a:fillRef idx="3">
-            <a:schemeClr val="accent1"/>
-          </a:fillRef>
-          <a:effectRef idx="2">
-            <a:schemeClr val="accent1"/>
-          </a:effectRef>
-          <a:fontRef idx="minor">
-            <a:schemeClr val="lt1"/>
-          </a:fontRef>
-        </p:style>
-        <p:txBody>
-          <a:bodyPr rtlCol="0" anchor="ctr"/>
-          <a:lstStyle/>
-          <a:p>
-            <a:pPr algn="ctr"/>
-          </a:p>
-        </p:txBody>
-      </p:sp>
-      <p:sp>
-        <p:nvSpPr>
-          <p:cNvPr id="76" name="TextBox 75"/>
-          <p:cNvSpPr txBox="1"/>
-          <p:nvPr/>
-        </p:nvSpPr>
-        <p:spPr>
-          <a:xfrm>
-            <a:off x="3941999" y="3096000"/>
-            <a:ext cx="792000" cy="125999"/>
-          </a:xfrm>
-          <a:prstGeom prst="rect">
-            <a:avLst/>
-          </a:prstGeom>
-          <a:noFill/>
-        </p:spPr>
-        <p:txBody>
-          <a:bodyPr wrap="square">
-            <a:spAutoFit/>
-          </a:bodyPr>
-          <a:lstStyle/>
-          <a:p>
-            <a:pPr algn="l">
-              <a:spcBef>
-                <a:spcPts val="0"/>
-              </a:spcBef>
-              <a:spcAft>
-                <a:spcPts val="0"/>
-              </a:spcAft>
-              <a:defRPr sz="650" b="1">
-                <a:solidFill>
-                  <a:srgbClr val="1E293B"/>
-                </a:solidFill>
-                <a:latin typeface="Segoe UI"/>
-              </a:defRPr>
-              <a:lnSpc>
-                <a:spcPct val="114999"/>
-              </a:lnSpc>
-            </a:pPr>
-            <a:r>
-              <a:t>Vehicle Violation</a:t>
-            </a:r>
-          </a:p>
-        </p:txBody>
-      </p:sp>
-      <p:sp>
-        <p:nvSpPr>
-          <p:cNvPr id="77" name="TextBox 76"/>
-          <p:cNvSpPr txBox="1"/>
-          <p:nvPr/>
-        </p:nvSpPr>
-        <p:spPr>
-          <a:xfrm>
-            <a:off x="3941999" y="3211200"/>
-            <a:ext cx="432000" cy="90000"/>
-          </a:xfrm>
-          <a:prstGeom prst="rect">
-            <a:avLst/>
-          </a:prstGeom>
-          <a:noFill/>
-        </p:spPr>
-        <p:txBody>
-          <a:bodyPr wrap="square">
-            <a:spAutoFit/>
-          </a:bodyPr>
-          <a:lstStyle/>
-          <a:p>
-            <a:pPr algn="l">
-              <a:spcBef>
-                <a:spcPts val="0"/>
-              </a:spcBef>
-              <a:spcAft>
-                <a:spcPts val="0"/>
-              </a:spcAft>
-              <a:defRPr sz="500" b="0">
-                <a:solidFill>
-                  <a:srgbClr val="94A3B8"/>
-                </a:solidFill>
-                <a:latin typeface="Segoe UI"/>
-              </a:defRPr>
-              <a:lnSpc>
-                <a:spcPct val="114999"/>
-              </a:lnSpc>
-            </a:pPr>
-            <a:r>
-              <a:t>车辆违规</a:t>
-            </a:r>
-          </a:p>
-        </p:txBody>
-      </p:sp>
-      <p:sp>
-        <p:nvSpPr>
-          <p:cNvPr id="78" name="Rounded Rectangle 77"/>
-          <p:cNvSpPr/>
-          <p:nvPr/>
-        </p:nvSpPr>
-        <p:spPr>
-          <a:xfrm>
-            <a:off x="4481999" y="3114000"/>
-            <a:ext cx="251999" cy="162000"/>
-          </a:xfrm>
-          <a:prstGeom prst="roundRect">
-            <a:avLst/>
-          </a:prstGeom>
-          <a:solidFill>
-            <a:srgbClr val="DBEAFE"/>
-          </a:solidFill>
-          <a:ln w="12700">
-            <a:solidFill>
-              <a:srgbClr val="E2E8F0"/>
-            </a:solidFill>
-          </a:ln>
-        </p:spPr>
-        <p:style>
-          <a:lnRef idx="1">
-            <a:schemeClr val="accent1"/>
-          </a:lnRef>
-          <a:fillRef idx="3">
-            <a:schemeClr val="accent1"/>
-          </a:fillRef>
-          <a:effectRef idx="2">
-            <a:schemeClr val="accent1"/>
-          </a:effectRef>
-          <a:fontRef idx="minor">
-            <a:schemeClr val="lt1"/>
-          </a:fontRef>
-        </p:style>
-        <p:txBody>
-          <a:bodyPr rtlCol="0" anchor="ctr"/>
-          <a:lstStyle/>
-          <a:p>
-            <a:pPr algn="ctr"/>
-          </a:p>
-        </p:txBody>
-      </p:sp>
-      <p:sp>
-        <p:nvSpPr>
-          <p:cNvPr id="79" name="TextBox 78"/>
-          <p:cNvSpPr txBox="1"/>
-          <p:nvPr/>
-        </p:nvSpPr>
-        <p:spPr>
-          <a:xfrm>
-            <a:off x="4481999" y="3114000"/>
-            <a:ext cx="251999" cy="162000"/>
-          </a:xfrm>
-          <a:prstGeom prst="rect">
-            <a:avLst/>
-          </a:prstGeom>
-          <a:noFill/>
-        </p:spPr>
-        <p:txBody>
-          <a:bodyPr wrap="square">
-            <a:spAutoFit/>
-          </a:bodyPr>
-          <a:lstStyle/>
-          <a:p>
-            <a:pPr algn="ctr">
-              <a:spcBef>
-                <a:spcPts val="0"/>
-              </a:spcBef>
-              <a:spcAft>
-                <a:spcPts val="0"/>
-              </a:spcAft>
-              <a:defRPr sz="450" b="0">
-                <a:solidFill>
-                  <a:srgbClr val="1E40AF"/>
-                </a:solidFill>
-                <a:latin typeface="Segoe UI"/>
-              </a:defRPr>
-              <a:lnSpc>
-                <a:spcPct val="114999"/>
-              </a:lnSpc>
-            </a:pPr>
-            <a:r>
-              <a:t>行为</a:t>
-            </a:r>
-          </a:p>
-        </p:txBody>
-      </p:sp>
-      <p:sp>
-        <p:nvSpPr>
-          <p:cNvPr id="80" name="Rounded Rectangle 79"/>
-          <p:cNvSpPr/>
-          <p:nvPr/>
-        </p:nvSpPr>
-        <p:spPr>
-          <a:xfrm>
-            <a:off x="4896000" y="3132000"/>
-            <a:ext cx="125999" cy="125999"/>
-          </a:xfrm>
-          <a:prstGeom prst="roundRect">
-            <a:avLst/>
-          </a:prstGeom>
-          <a:solidFill>
-            <a:srgbClr val="9CA3AF"/>
-          </a:solidFill>
-          <a:ln w="12700">
-            <a:solidFill>
-              <a:srgbClr val="9CA3AF"/>
-            </a:solidFill>
-          </a:ln>
-        </p:spPr>
-        <p:style>
-          <a:lnRef idx="1">
-            <a:schemeClr val="accent1"/>
-          </a:lnRef>
-          <a:fillRef idx="3">
-            <a:schemeClr val="accent1"/>
-          </a:fillRef>
-          <a:effectRef idx="2">
-            <a:schemeClr val="accent1"/>
-          </a:effectRef>
-          <a:fontRef idx="minor">
-            <a:schemeClr val="lt1"/>
-          </a:fontRef>
-        </p:style>
-        <p:txBody>
-          <a:bodyPr rtlCol="0" anchor="ctr"/>
-          <a:lstStyle/>
-          <a:p>
-            <a:pPr algn="ctr"/>
-          </a:p>
-        </p:txBody>
-      </p:sp>
-      <p:sp>
-        <p:nvSpPr>
-          <p:cNvPr id="81" name="TextBox 80"/>
-          <p:cNvSpPr txBox="1"/>
-          <p:nvPr/>
-        </p:nvSpPr>
-        <p:spPr>
-          <a:xfrm>
-            <a:off x="5076000" y="3096000"/>
-            <a:ext cx="792000" cy="125999"/>
-          </a:xfrm>
-          <a:prstGeom prst="rect">
-            <a:avLst/>
-          </a:prstGeom>
-          <a:noFill/>
-        </p:spPr>
-        <p:txBody>
-          <a:bodyPr wrap="square">
-            <a:spAutoFit/>
-          </a:bodyPr>
-          <a:lstStyle/>
-          <a:p>
-            <a:pPr algn="l">
-              <a:spcBef>
-                <a:spcPts val="0"/>
-              </a:spcBef>
-              <a:spcAft>
-                <a:spcPts val="0"/>
-              </a:spcAft>
-              <a:defRPr sz="650" b="1">
-                <a:solidFill>
-                  <a:srgbClr val="1E293B"/>
-                </a:solidFill>
-                <a:latin typeface="Segoe UI"/>
-              </a:defRPr>
-              <a:lnSpc>
-                <a:spcPct val="114999"/>
-              </a:lnSpc>
-            </a:pPr>
-            <a:r>
-              <a:t>Suspended Platform</a:t>
-            </a:r>
-          </a:p>
-        </p:txBody>
-      </p:sp>
-      <p:sp>
-        <p:nvSpPr>
-          <p:cNvPr id="82" name="TextBox 81"/>
-          <p:cNvSpPr txBox="1"/>
-          <p:nvPr/>
-        </p:nvSpPr>
-        <p:spPr>
-          <a:xfrm>
-            <a:off x="5076000" y="3211200"/>
-            <a:ext cx="432000" cy="90000"/>
-          </a:xfrm>
-          <a:prstGeom prst="rect">
-            <a:avLst/>
-          </a:prstGeom>
-          <a:noFill/>
-        </p:spPr>
-        <p:txBody>
-          <a:bodyPr wrap="square">
-            <a:spAutoFit/>
-          </a:bodyPr>
-          <a:lstStyle/>
-          <a:p>
-            <a:pPr algn="l">
-              <a:spcBef>
-                <a:spcPts val="0"/>
-              </a:spcBef>
-              <a:spcAft>
-                <a:spcPts val="0"/>
-              </a:spcAft>
-              <a:defRPr sz="500" b="0">
-                <a:solidFill>
-                  <a:srgbClr val="94A3B8"/>
-                </a:solidFill>
-                <a:latin typeface="Segoe UI"/>
-              </a:defRPr>
-              <a:lnSpc>
-                <a:spcPct val="114999"/>
-              </a:lnSpc>
-            </a:pPr>
-            <a:r>
-              <a:t>吊篮作业</a:t>
-            </a:r>
-          </a:p>
-        </p:txBody>
-      </p:sp>
-      <p:sp>
-        <p:nvSpPr>
-          <p:cNvPr id="83" name="Rounded Rectangle 82"/>
-          <p:cNvSpPr/>
-          <p:nvPr/>
-        </p:nvSpPr>
-        <p:spPr>
-          <a:xfrm>
-            <a:off x="5616000" y="3114000"/>
-            <a:ext cx="251999" cy="162000"/>
+            <a:off x="4482000" y="6389913"/>
+            <a:ext cx="251999" cy="162001"/>
           </a:xfrm>
           <a:prstGeom prst="roundRect">
             <a:avLst/>
@@ -6862,19 +7038,20 @@
           <a:lstStyle/>
           <a:p>
             <a:pPr algn="ctr"/>
-          </a:p>
-        </p:txBody>
-      </p:sp>
-      <p:sp>
-        <p:nvSpPr>
-          <p:cNvPr id="84" name="TextBox 83"/>
-          <p:cNvSpPr txBox="1"/>
-          <p:nvPr/>
-        </p:nvSpPr>
-        <p:spPr>
-          <a:xfrm>
-            <a:off x="5616000" y="3114000"/>
-            <a:ext cx="251999" cy="162000"/>
+            <a:endParaRPr/>
+          </a:p>
+        </p:txBody>
+      </p:sp>
+      <p:sp>
+        <p:nvSpPr>
+          <p:cNvPr id="89" name="TextBox 88"/>
+          <p:cNvSpPr txBox="1"/>
+          <p:nvPr/>
+        </p:nvSpPr>
+        <p:spPr>
+          <a:xfrm>
+            <a:off x="4482000" y="6389913"/>
+            <a:ext cx="251999" cy="162001"/>
           </a:xfrm>
           <a:prstGeom prst="rect">
             <a:avLst/>
@@ -6900,234 +7077,6 @@
                 </a:solidFill>
                 <a:latin typeface="Segoe UI"/>
               </a:defRPr>
-              <a:lnSpc>
-                <a:spcPct val="114999"/>
-              </a:lnSpc>
-            </a:pPr>
-            <a:r>
-              <a:t>物</a:t>
-            </a:r>
-          </a:p>
-        </p:txBody>
-      </p:sp>
-      <p:sp>
-        <p:nvSpPr>
-          <p:cNvPr id="85" name="Rounded Rectangle 84"/>
-          <p:cNvSpPr/>
-          <p:nvPr/>
-        </p:nvSpPr>
-        <p:spPr>
-          <a:xfrm>
-            <a:off x="6030000" y="3132000"/>
-            <a:ext cx="125999" cy="125999"/>
-          </a:xfrm>
-          <a:prstGeom prst="roundRect">
-            <a:avLst/>
-          </a:prstGeom>
-          <a:solidFill>
-            <a:srgbClr val="6B7280"/>
-          </a:solidFill>
-          <a:ln w="12700">
-            <a:solidFill>
-              <a:srgbClr val="6B7280"/>
-            </a:solidFill>
-          </a:ln>
-        </p:spPr>
-        <p:style>
-          <a:lnRef idx="1">
-            <a:schemeClr val="accent1"/>
-          </a:lnRef>
-          <a:fillRef idx="3">
-            <a:schemeClr val="accent1"/>
-          </a:fillRef>
-          <a:effectRef idx="2">
-            <a:schemeClr val="accent1"/>
-          </a:effectRef>
-          <a:fontRef idx="minor">
-            <a:schemeClr val="lt1"/>
-          </a:fontRef>
-        </p:style>
-        <p:txBody>
-          <a:bodyPr rtlCol="0" anchor="ctr"/>
-          <a:lstStyle/>
-          <a:p>
-            <a:pPr algn="ctr"/>
-          </a:p>
-        </p:txBody>
-      </p:sp>
-      <p:sp>
-        <p:nvSpPr>
-          <p:cNvPr id="86" name="TextBox 85"/>
-          <p:cNvSpPr txBox="1"/>
-          <p:nvPr/>
-        </p:nvSpPr>
-        <p:spPr>
-          <a:xfrm>
-            <a:off x="6210000" y="3096000"/>
-            <a:ext cx="792000" cy="125999"/>
-          </a:xfrm>
-          <a:prstGeom prst="rect">
-            <a:avLst/>
-          </a:prstGeom>
-          <a:noFill/>
-        </p:spPr>
-        <p:txBody>
-          <a:bodyPr wrap="square">
-            <a:spAutoFit/>
-          </a:bodyPr>
-          <a:lstStyle/>
-          <a:p>
-            <a:pPr algn="l">
-              <a:spcBef>
-                <a:spcPts val="0"/>
-              </a:spcBef>
-              <a:spcAft>
-                <a:spcPts val="0"/>
-              </a:spcAft>
-              <a:defRPr sz="650" b="1">
-                <a:solidFill>
-                  <a:srgbClr val="1E293B"/>
-                </a:solidFill>
-                <a:latin typeface="Segoe UI"/>
-              </a:defRPr>
-              <a:lnSpc>
-                <a:spcPct val="114999"/>
-              </a:lnSpc>
-            </a:pPr>
-            <a:r>
-              <a:t>Enclosure Breach</a:t>
-            </a:r>
-          </a:p>
-        </p:txBody>
-      </p:sp>
-      <p:sp>
-        <p:nvSpPr>
-          <p:cNvPr id="87" name="TextBox 86"/>
-          <p:cNvSpPr txBox="1"/>
-          <p:nvPr/>
-        </p:nvSpPr>
-        <p:spPr>
-          <a:xfrm>
-            <a:off x="6210000" y="3211200"/>
-            <a:ext cx="432000" cy="90000"/>
-          </a:xfrm>
-          <a:prstGeom prst="rect">
-            <a:avLst/>
-          </a:prstGeom>
-          <a:noFill/>
-        </p:spPr>
-        <p:txBody>
-          <a:bodyPr wrap="square">
-            <a:spAutoFit/>
-          </a:bodyPr>
-          <a:lstStyle/>
-          <a:p>
-            <a:pPr algn="l">
-              <a:spcBef>
-                <a:spcPts val="0"/>
-              </a:spcBef>
-              <a:spcAft>
-                <a:spcPts val="0"/>
-              </a:spcAft>
-              <a:defRPr sz="500" b="0">
-                <a:solidFill>
-                  <a:srgbClr val="94A3B8"/>
-                </a:solidFill>
-                <a:latin typeface="Segoe UI"/>
-              </a:defRPr>
-              <a:lnSpc>
-                <a:spcPct val="114999"/>
-              </a:lnSpc>
-            </a:pPr>
-            <a:r>
-              <a:t>工地围挡封闭</a:t>
-            </a:r>
-          </a:p>
-        </p:txBody>
-      </p:sp>
-      <p:sp>
-        <p:nvSpPr>
-          <p:cNvPr id="88" name="Rounded Rectangle 87"/>
-          <p:cNvSpPr/>
-          <p:nvPr/>
-        </p:nvSpPr>
-        <p:spPr>
-          <a:xfrm>
-            <a:off x="6750000" y="3114000"/>
-            <a:ext cx="251999" cy="162000"/>
-          </a:xfrm>
-          <a:prstGeom prst="roundRect">
-            <a:avLst/>
-          </a:prstGeom>
-          <a:solidFill>
-            <a:srgbClr val="FEF3C7"/>
-          </a:solidFill>
-          <a:ln w="12700">
-            <a:solidFill>
-              <a:srgbClr val="E2E8F0"/>
-            </a:solidFill>
-          </a:ln>
-        </p:spPr>
-        <p:style>
-          <a:lnRef idx="1">
-            <a:schemeClr val="accent1"/>
-          </a:lnRef>
-          <a:fillRef idx="3">
-            <a:schemeClr val="accent1"/>
-          </a:fillRef>
-          <a:effectRef idx="2">
-            <a:schemeClr val="accent1"/>
-          </a:effectRef>
-          <a:fontRef idx="minor">
-            <a:schemeClr val="lt1"/>
-          </a:fontRef>
-        </p:style>
-        <p:txBody>
-          <a:bodyPr rtlCol="0" anchor="ctr"/>
-          <a:lstStyle/>
-          <a:p>
-            <a:pPr algn="ctr"/>
-          </a:p>
-        </p:txBody>
-      </p:sp>
-      <p:sp>
-        <p:nvSpPr>
-          <p:cNvPr id="89" name="TextBox 88"/>
-          <p:cNvSpPr txBox="1"/>
-          <p:nvPr/>
-        </p:nvSpPr>
-        <p:spPr>
-          <a:xfrm>
-            <a:off x="6750000" y="3114000"/>
-            <a:ext cx="251999" cy="162000"/>
-          </a:xfrm>
-          <a:prstGeom prst="rect">
-            <a:avLst/>
-          </a:prstGeom>
-          <a:noFill/>
-        </p:spPr>
-        <p:txBody>
-          <a:bodyPr wrap="square">
-            <a:spAutoFit/>
-          </a:bodyPr>
-          <a:lstStyle/>
-          <a:p>
-            <a:pPr algn="ctr">
-              <a:spcBef>
-                <a:spcPts val="0"/>
-              </a:spcBef>
-              <a:spcAft>
-                <a:spcPts val="0"/>
-              </a:spcAft>
-              <a:defRPr sz="450" b="0">
-                <a:solidFill>
-                  <a:srgbClr val="92400E"/>
-                </a:solidFill>
-                <a:latin typeface="Segoe UI"/>
-              </a:defRPr>
-              <a:lnSpc>
-                <a:spcPct val="114999"/>
-              </a:lnSpc>
             </a:pPr>
             <a:r>
               <a:t>物</a:t>
@@ -7143,8 +7092,8 @@
         </p:nvSpPr>
         <p:spPr>
           <a:xfrm>
-            <a:off x="360000" y="3348000"/>
-            <a:ext cx="162000" cy="162000"/>
+            <a:off x="360000" y="7257645"/>
+            <a:ext cx="162000" cy="162001"/>
           </a:xfrm>
           <a:prstGeom prst="roundRect">
             <a:avLst/>
@@ -7177,6 +7126,7 @@
           <a:lstStyle/>
           <a:p>
             <a:pPr algn="ctr"/>
+            <a:endParaRPr/>
           </a:p>
         </p:txBody>
       </p:sp>
@@ -7188,7 +7138,7 @@
         </p:nvSpPr>
         <p:spPr>
           <a:xfrm>
-            <a:off x="611999" y="3340800"/>
+            <a:off x="611999" y="7250445"/>
             <a:ext cx="2880000" cy="180000"/>
           </a:xfrm>
           <a:prstGeom prst="rect">
@@ -7215,9 +7165,6 @@
                 </a:solidFill>
                 <a:latin typeface="Segoe UI"/>
               </a:defRPr>
-              <a:lnSpc>
-                <a:spcPct val="114999"/>
-              </a:lnSpc>
             </a:pPr>
             <a:r>
               <a:t>6-Step Closed-Loop Workflow / 六步全流程闭环</a:t>
@@ -7233,7 +7180,7 @@
         </p:nvSpPr>
         <p:spPr>
           <a:xfrm>
-            <a:off x="360000" y="3546000"/>
+            <a:off x="360000" y="7455645"/>
             <a:ext cx="2880000" cy="7200"/>
           </a:xfrm>
           <a:prstGeom prst="rect">
@@ -7267,6 +7214,7 @@
           <a:lstStyle/>
           <a:p>
             <a:pPr algn="ctr"/>
+            <a:endParaRPr/>
           </a:p>
         </p:txBody>
       </p:sp>
@@ -7278,7 +7226,7 @@
         </p:nvSpPr>
         <p:spPr>
           <a:xfrm>
-            <a:off x="540000" y="3564000"/>
+            <a:off x="540000" y="7473645"/>
             <a:ext cx="396000" cy="396000"/>
           </a:xfrm>
           <a:prstGeom prst="roundRect">
@@ -7312,6 +7260,7 @@
           <a:lstStyle/>
           <a:p>
             <a:pPr algn="ctr"/>
+            <a:endParaRPr/>
           </a:p>
         </p:txBody>
       </p:sp>
@@ -7323,7 +7272,7 @@
         </p:nvSpPr>
         <p:spPr>
           <a:xfrm>
-            <a:off x="540000" y="3582000"/>
+            <a:off x="540000" y="7491645"/>
             <a:ext cx="396000" cy="360000"/>
           </a:xfrm>
           <a:prstGeom prst="rect">
@@ -7350,9 +7299,6 @@
                 </a:solidFill>
                 <a:latin typeface="Segoe UI"/>
               </a:defRPr>
-              <a:lnSpc>
-                <a:spcPct val="114999"/>
-              </a:lnSpc>
             </a:pPr>
             <a:r>
               <a:t>📸</a:t>
@@ -7368,8 +7314,8 @@
         </p:nvSpPr>
         <p:spPr>
           <a:xfrm>
-            <a:off x="360000" y="3978000"/>
-            <a:ext cx="774000" cy="125999"/>
+            <a:off x="360000" y="7887644"/>
+            <a:ext cx="774000" cy="126000"/>
           </a:xfrm>
           <a:prstGeom prst="rect">
             <a:avLst/>
@@ -7395,9 +7341,6 @@
                 </a:solidFill>
                 <a:latin typeface="Segoe UI"/>
               </a:defRPr>
-              <a:lnSpc>
-                <a:spcPct val="114999"/>
-              </a:lnSpc>
             </a:pPr>
             <a:r>
               <a:t>AI Detection</a:t>
@@ -7413,7 +7356,7 @@
         </p:nvSpPr>
         <p:spPr>
           <a:xfrm>
-            <a:off x="360000" y="4085999"/>
+            <a:off x="360000" y="7995644"/>
             <a:ext cx="774000" cy="90000"/>
           </a:xfrm>
           <a:prstGeom prst="rect">
@@ -7440,9 +7383,6 @@
                 </a:solidFill>
                 <a:latin typeface="Segoe UI"/>
               </a:defRPr>
-              <a:lnSpc>
-                <a:spcPct val="114999"/>
-              </a:lnSpc>
             </a:pPr>
             <a:r>
               <a:t>AI智能检测</a:t>
@@ -7458,7 +7398,7 @@
         </p:nvSpPr>
         <p:spPr>
           <a:xfrm>
-            <a:off x="1026000" y="3654000"/>
+            <a:off x="1026000" y="7563645"/>
             <a:ext cx="360000" cy="180000"/>
           </a:xfrm>
           <a:prstGeom prst="rect">
@@ -7485,9 +7425,6 @@
                 </a:solidFill>
                 <a:latin typeface="Segoe UI"/>
               </a:defRPr>
-              <a:lnSpc>
-                <a:spcPct val="114999"/>
-              </a:lnSpc>
             </a:pPr>
             <a:r>
               <a:t>▸</a:t>
@@ -7503,7 +7440,7 @@
         </p:nvSpPr>
         <p:spPr>
           <a:xfrm>
-            <a:off x="1674000" y="3564000"/>
+            <a:off x="1674000" y="7473645"/>
             <a:ext cx="396000" cy="396000"/>
           </a:xfrm>
           <a:prstGeom prst="roundRect">
@@ -7537,6 +7474,7 @@
           <a:lstStyle/>
           <a:p>
             <a:pPr algn="ctr"/>
+            <a:endParaRPr/>
           </a:p>
         </p:txBody>
       </p:sp>
@@ -7548,7 +7486,7 @@
         </p:nvSpPr>
         <p:spPr>
           <a:xfrm>
-            <a:off x="1674000" y="3582000"/>
+            <a:off x="1674000" y="7491645"/>
             <a:ext cx="396000" cy="360000"/>
           </a:xfrm>
           <a:prstGeom prst="rect">
@@ -7575,9 +7513,6 @@
                 </a:solidFill>
                 <a:latin typeface="Segoe UI"/>
               </a:defRPr>
-              <a:lnSpc>
-                <a:spcPct val="114999"/>
-              </a:lnSpc>
             </a:pPr>
             <a:r>
               <a:t>👁</a:t>
@@ -7593,8 +7528,8 @@
         </p:nvSpPr>
         <p:spPr>
           <a:xfrm>
-            <a:off x="1494000" y="3978000"/>
-            <a:ext cx="774000" cy="125999"/>
+            <a:off x="1494000" y="7887644"/>
+            <a:ext cx="774000" cy="126000"/>
           </a:xfrm>
           <a:prstGeom prst="rect">
             <a:avLst/>
@@ -7620,9 +7555,6 @@
                 </a:solidFill>
                 <a:latin typeface="Segoe UI"/>
               </a:defRPr>
-              <a:lnSpc>
-                <a:spcPct val="114999"/>
-              </a:lnSpc>
             </a:pPr>
             <a:r>
               <a:t>Human Review</a:t>
@@ -7638,7 +7570,7 @@
         </p:nvSpPr>
         <p:spPr>
           <a:xfrm>
-            <a:off x="1494000" y="4085999"/>
+            <a:off x="1494000" y="7995644"/>
             <a:ext cx="774000" cy="90000"/>
           </a:xfrm>
           <a:prstGeom prst="rect">
@@ -7665,9 +7597,6 @@
                 </a:solidFill>
                 <a:latin typeface="Segoe UI"/>
               </a:defRPr>
-              <a:lnSpc>
-                <a:spcPct val="114999"/>
-              </a:lnSpc>
             </a:pPr>
             <a:r>
               <a:t>人工复核</a:t>
@@ -7683,7 +7612,7 @@
         </p:nvSpPr>
         <p:spPr>
           <a:xfrm>
-            <a:off x="2160000" y="3654000"/>
+            <a:off x="2160000" y="7563645"/>
             <a:ext cx="360000" cy="180000"/>
           </a:xfrm>
           <a:prstGeom prst="rect">
@@ -7710,9 +7639,6 @@
                 </a:solidFill>
                 <a:latin typeface="Segoe UI"/>
               </a:defRPr>
-              <a:lnSpc>
-                <a:spcPct val="114999"/>
-              </a:lnSpc>
             </a:pPr>
             <a:r>
               <a:t>▸</a:t>
@@ -7728,7 +7654,7 @@
         </p:nvSpPr>
         <p:spPr>
           <a:xfrm>
-            <a:off x="2808000" y="3564000"/>
+            <a:off x="2808000" y="7473645"/>
             <a:ext cx="396000" cy="396000"/>
           </a:xfrm>
           <a:prstGeom prst="roundRect">
@@ -7762,6 +7688,7 @@
           <a:lstStyle/>
           <a:p>
             <a:pPr algn="ctr"/>
+            <a:endParaRPr/>
           </a:p>
         </p:txBody>
       </p:sp>
@@ -7773,7 +7700,7 @@
         </p:nvSpPr>
         <p:spPr>
           <a:xfrm>
-            <a:off x="2808000" y="3582000"/>
+            <a:off x="2808000" y="7491645"/>
             <a:ext cx="396000" cy="360000"/>
           </a:xfrm>
           <a:prstGeom prst="rect">
@@ -7800,9 +7727,6 @@
                 </a:solidFill>
                 <a:latin typeface="Segoe UI"/>
               </a:defRPr>
-              <a:lnSpc>
-                <a:spcPct val="114999"/>
-              </a:lnSpc>
             </a:pPr>
             <a:r>
               <a:t>📋</a:t>
@@ -7818,8 +7742,8 @@
         </p:nvSpPr>
         <p:spPr>
           <a:xfrm>
-            <a:off x="2628000" y="3978000"/>
-            <a:ext cx="774000" cy="125999"/>
+            <a:off x="2628000" y="7887644"/>
+            <a:ext cx="774000" cy="126000"/>
           </a:xfrm>
           <a:prstGeom prst="rect">
             <a:avLst/>
@@ -7845,9 +7769,6 @@
                 </a:solidFill>
                 <a:latin typeface="Segoe UI"/>
               </a:defRPr>
-              <a:lnSpc>
-                <a:spcPct val="114999"/>
-              </a:lnSpc>
             </a:pPr>
             <a:r>
               <a:t>WO Dispatch</a:t>
@@ -7863,7 +7784,7 @@
         </p:nvSpPr>
         <p:spPr>
           <a:xfrm>
-            <a:off x="2628000" y="4085999"/>
+            <a:off x="2628000" y="7995644"/>
             <a:ext cx="774000" cy="90000"/>
           </a:xfrm>
           <a:prstGeom prst="rect">
@@ -7890,9 +7811,6 @@
                 </a:solidFill>
                 <a:latin typeface="Segoe UI"/>
               </a:defRPr>
-              <a:lnSpc>
-                <a:spcPct val="114999"/>
-              </a:lnSpc>
             </a:pPr>
             <a:r>
               <a:t>工单派发</a:t>
@@ -7908,7 +7826,7 @@
         </p:nvSpPr>
         <p:spPr>
           <a:xfrm>
-            <a:off x="3294000" y="3654000"/>
+            <a:off x="3294000" y="7563645"/>
             <a:ext cx="360000" cy="180000"/>
           </a:xfrm>
           <a:prstGeom prst="rect">
@@ -7935,9 +7853,6 @@
                 </a:solidFill>
                 <a:latin typeface="Segoe UI"/>
               </a:defRPr>
-              <a:lnSpc>
-                <a:spcPct val="114999"/>
-              </a:lnSpc>
             </a:pPr>
             <a:r>
               <a:t>▸</a:t>
@@ -7953,7 +7868,7 @@
         </p:nvSpPr>
         <p:spPr>
           <a:xfrm>
-            <a:off x="3941999" y="3564000"/>
+            <a:off x="3941999" y="7473645"/>
             <a:ext cx="396000" cy="396000"/>
           </a:xfrm>
           <a:prstGeom prst="roundRect">
@@ -7987,6 +7902,7 @@
           <a:lstStyle/>
           <a:p>
             <a:pPr algn="ctr"/>
+            <a:endParaRPr/>
           </a:p>
         </p:txBody>
       </p:sp>
@@ -7998,7 +7914,7 @@
         </p:nvSpPr>
         <p:spPr>
           <a:xfrm>
-            <a:off x="3941999" y="3582000"/>
+            <a:off x="3941999" y="7491645"/>
             <a:ext cx="396000" cy="360000"/>
           </a:xfrm>
           <a:prstGeom prst="rect">
@@ -8025,9 +7941,6 @@
                 </a:solidFill>
                 <a:latin typeface="Segoe UI"/>
               </a:defRPr>
-              <a:lnSpc>
-                <a:spcPct val="114999"/>
-              </a:lnSpc>
             </a:pPr>
             <a:r>
               <a:t>🔧</a:t>
@@ -8043,8 +7956,8 @@
         </p:nvSpPr>
         <p:spPr>
           <a:xfrm>
-            <a:off x="3761999" y="3978000"/>
-            <a:ext cx="774000" cy="125999"/>
+            <a:off x="3761999" y="7887644"/>
+            <a:ext cx="774000" cy="126000"/>
           </a:xfrm>
           <a:prstGeom prst="rect">
             <a:avLst/>
@@ -8070,9 +7983,6 @@
                 </a:solidFill>
                 <a:latin typeface="Segoe UI"/>
               </a:defRPr>
-              <a:lnSpc>
-                <a:spcPct val="114999"/>
-              </a:lnSpc>
             </a:pPr>
             <a:r>
               <a:t>Rectification</a:t>
@@ -8088,7 +7998,7 @@
         </p:nvSpPr>
         <p:spPr>
           <a:xfrm>
-            <a:off x="3761999" y="4085999"/>
+            <a:off x="3761999" y="7995644"/>
             <a:ext cx="774000" cy="90000"/>
           </a:xfrm>
           <a:prstGeom prst="rect">
@@ -8115,9 +8025,6 @@
                 </a:solidFill>
                 <a:latin typeface="Segoe UI"/>
               </a:defRPr>
-              <a:lnSpc>
-                <a:spcPct val="114999"/>
-              </a:lnSpc>
             </a:pPr>
             <a:r>
               <a:t>现场整改</a:t>
@@ -8133,7 +8040,7 @@
         </p:nvSpPr>
         <p:spPr>
           <a:xfrm>
-            <a:off x="4427999" y="3654000"/>
+            <a:off x="4427999" y="7563645"/>
             <a:ext cx="360000" cy="180000"/>
           </a:xfrm>
           <a:prstGeom prst="rect">
@@ -8160,9 +8067,6 @@
                 </a:solidFill>
                 <a:latin typeface="Segoe UI"/>
               </a:defRPr>
-              <a:lnSpc>
-                <a:spcPct val="114999"/>
-              </a:lnSpc>
             </a:pPr>
             <a:r>
               <a:t>▸</a:t>
@@ -8178,7 +8082,7 @@
         </p:nvSpPr>
         <p:spPr>
           <a:xfrm>
-            <a:off x="5076000" y="3564000"/>
+            <a:off x="5076000" y="7473645"/>
             <a:ext cx="396000" cy="396000"/>
           </a:xfrm>
           <a:prstGeom prst="roundRect">
@@ -8212,6 +8116,7 @@
           <a:lstStyle/>
           <a:p>
             <a:pPr algn="ctr"/>
+            <a:endParaRPr/>
           </a:p>
         </p:txBody>
       </p:sp>
@@ -8223,7 +8128,7 @@
         </p:nvSpPr>
         <p:spPr>
           <a:xfrm>
-            <a:off x="5076000" y="3582000"/>
+            <a:off x="5076000" y="7491645"/>
             <a:ext cx="396000" cy="360000"/>
           </a:xfrm>
           <a:prstGeom prst="rect">
@@ -8250,9 +8155,6 @@
                 </a:solidFill>
                 <a:latin typeface="Segoe UI"/>
               </a:defRPr>
-              <a:lnSpc>
-                <a:spcPct val="114999"/>
-              </a:lnSpc>
             </a:pPr>
             <a:r>
               <a:t>✅</a:t>
@@ -8268,8 +8170,8 @@
         </p:nvSpPr>
         <p:spPr>
           <a:xfrm>
-            <a:off x="4896000" y="3978000"/>
-            <a:ext cx="774000" cy="125999"/>
+            <a:off x="4896000" y="7887644"/>
+            <a:ext cx="774000" cy="126000"/>
           </a:xfrm>
           <a:prstGeom prst="rect">
             <a:avLst/>
@@ -8295,9 +8197,6 @@
                 </a:solidFill>
                 <a:latin typeface="Segoe UI"/>
               </a:defRPr>
-              <a:lnSpc>
-                <a:spcPct val="114999"/>
-              </a:lnSpc>
             </a:pPr>
             <a:r>
               <a:t>Verification</a:t>
@@ -8313,7 +8212,7 @@
         </p:nvSpPr>
         <p:spPr>
           <a:xfrm>
-            <a:off x="4896000" y="4085999"/>
+            <a:off x="4896000" y="7995644"/>
             <a:ext cx="774000" cy="90000"/>
           </a:xfrm>
           <a:prstGeom prst="rect">
@@ -8340,9 +8239,6 @@
                 </a:solidFill>
                 <a:latin typeface="Segoe UI"/>
               </a:defRPr>
-              <a:lnSpc>
-                <a:spcPct val="114999"/>
-              </a:lnSpc>
             </a:pPr>
             <a:r>
               <a:t>整改验收</a:t>
@@ -8358,7 +8254,7 @@
         </p:nvSpPr>
         <p:spPr>
           <a:xfrm>
-            <a:off x="5562000" y="3654000"/>
+            <a:off x="5562000" y="7563645"/>
             <a:ext cx="360000" cy="180000"/>
           </a:xfrm>
           <a:prstGeom prst="rect">
@@ -8385,9 +8281,6 @@
                 </a:solidFill>
                 <a:latin typeface="Segoe UI"/>
               </a:defRPr>
-              <a:lnSpc>
-                <a:spcPct val="114999"/>
-              </a:lnSpc>
             </a:pPr>
             <a:r>
               <a:t>▸</a:t>
@@ -8403,7 +8296,7 @@
         </p:nvSpPr>
         <p:spPr>
           <a:xfrm>
-            <a:off x="6210000" y="3564000"/>
+            <a:off x="6210000" y="7473645"/>
             <a:ext cx="396000" cy="396000"/>
           </a:xfrm>
           <a:prstGeom prst="roundRect">
@@ -8437,6 +8330,7 @@
           <a:lstStyle/>
           <a:p>
             <a:pPr algn="ctr"/>
+            <a:endParaRPr/>
           </a:p>
         </p:txBody>
       </p:sp>
@@ -8448,7 +8342,7 @@
         </p:nvSpPr>
         <p:spPr>
           <a:xfrm>
-            <a:off x="6210000" y="3582000"/>
+            <a:off x="6210000" y="7491645"/>
             <a:ext cx="396000" cy="360000"/>
           </a:xfrm>
           <a:prstGeom prst="rect">
@@ -8475,9 +8369,6 @@
                 </a:solidFill>
                 <a:latin typeface="Segoe UI"/>
               </a:defRPr>
-              <a:lnSpc>
-                <a:spcPct val="114999"/>
-              </a:lnSpc>
             </a:pPr>
             <a:r>
               <a:t>🔒</a:t>
@@ -8493,8 +8384,8 @@
         </p:nvSpPr>
         <p:spPr>
           <a:xfrm>
-            <a:off x="6030000" y="3978000"/>
-            <a:ext cx="774000" cy="125999"/>
+            <a:off x="6030000" y="7887644"/>
+            <a:ext cx="774000" cy="126000"/>
           </a:xfrm>
           <a:prstGeom prst="rect">
             <a:avLst/>
@@ -8520,9 +8411,6 @@
                 </a:solidFill>
                 <a:latin typeface="Segoe UI"/>
               </a:defRPr>
-              <a:lnSpc>
-                <a:spcPct val="114999"/>
-              </a:lnSpc>
             </a:pPr>
             <a:r>
               <a:t>Closure</a:t>
@@ -8538,7 +8426,7 @@
         </p:nvSpPr>
         <p:spPr>
           <a:xfrm>
-            <a:off x="6030000" y="4085999"/>
+            <a:off x="6030000" y="7995644"/>
             <a:ext cx="774000" cy="90000"/>
           </a:xfrm>
           <a:prstGeom prst="rect">
@@ -8565,9 +8453,6 @@
                 </a:solidFill>
                 <a:latin typeface="Segoe UI"/>
               </a:defRPr>
-              <a:lnSpc>
-                <a:spcPct val="114999"/>
-              </a:lnSpc>
             </a:pPr>
             <a:r>
               <a:t>闭环归档</a:t>
@@ -8583,8 +8468,8 @@
         </p:nvSpPr>
         <p:spPr>
           <a:xfrm>
-            <a:off x="360000" y="4248000"/>
-            <a:ext cx="2232000" cy="1007999"/>
+            <a:off x="360000" y="8157644"/>
+            <a:ext cx="2232000" cy="1820290"/>
           </a:xfrm>
           <a:prstGeom prst="rect">
             <a:avLst/>
@@ -8614,7 +8499,7 @@
           </a:fontRef>
         </p:style>
         <p:txBody>
-          <a:bodyPr rtlCol="0" anchor="ctr" wrap="square"/>
+          <a:bodyPr wrap="square" rtlCol="0" anchor="ctr"/>
           <a:lstStyle/>
           <a:p>
             <a:pPr algn="ctr">
@@ -8624,6 +8509,7 @@
               <a:defRPr sz="1600"/>
             </a:pPr>
             <a:r>
+              <a:rPr dirty="0"/>
               <a:t>🖼</a:t>
             </a:r>
           </a:p>
@@ -8637,6 +8523,7 @@
               </a:defRPr>
             </a:pPr>
             <a:r>
+              <a:rPr dirty="0"/>
               <a:t>Camera Live View + AI Annotations</a:t>
             </a:r>
           </a:p>
@@ -8650,8 +8537,18 @@
               </a:defRPr>
             </a:pPr>
             <a:r>
-              <a:t>摄像头实时画面 + AI标注效果示意</a:t>
-            </a:r>
+              <a:rPr dirty="0" err="1"/>
+              <a:t>摄像头实时画面</a:t>
+            </a:r>
+            <a:r>
+              <a:rPr dirty="0"/>
+              <a:t> + </a:t>
+            </a:r>
+            <a:r>
+              <a:rPr dirty="0" err="1"/>
+              <a:t>AI标注效果示意</a:t>
+            </a:r>
+            <a:endParaRPr dirty="0"/>
           </a:p>
         </p:txBody>
       </p:sp>
@@ -8663,8 +8560,8 @@
         </p:nvSpPr>
         <p:spPr>
           <a:xfrm>
-            <a:off x="2700000" y="4248000"/>
-            <a:ext cx="2232000" cy="1007999"/>
+            <a:off x="2700000" y="8157644"/>
+            <a:ext cx="2232000" cy="1827490"/>
           </a:xfrm>
           <a:prstGeom prst="rect">
             <a:avLst/>
@@ -8694,7 +8591,7 @@
           </a:fontRef>
         </p:style>
         <p:txBody>
-          <a:bodyPr rtlCol="0" anchor="ctr" wrap="square"/>
+          <a:bodyPr wrap="square" rtlCol="0" anchor="ctr"/>
           <a:lstStyle/>
           <a:p>
             <a:pPr algn="ctr">
@@ -8743,8 +8640,8 @@
         </p:nvSpPr>
         <p:spPr>
           <a:xfrm>
-            <a:off x="5040000" y="4248000"/>
-            <a:ext cx="2160000" cy="1007999"/>
+            <a:off x="5040000" y="8157644"/>
+            <a:ext cx="2160000" cy="1820290"/>
           </a:xfrm>
           <a:prstGeom prst="rect">
             <a:avLst/>
@@ -8774,7 +8671,7 @@
           </a:fontRef>
         </p:style>
         <p:txBody>
-          <a:bodyPr rtlCol="0" anchor="ctr" wrap="square"/>
+          <a:bodyPr wrap="square" rtlCol="0" anchor="ctr"/>
           <a:lstStyle/>
           <a:p>
             <a:pPr algn="ctr">
@@ -8857,6 +8754,7 @@
           <a:lstStyle/>
           <a:p>
             <a:pPr algn="ctr"/>
+            <a:endParaRPr/>
           </a:p>
         </p:txBody>
       </p:sp>
@@ -8895,9 +8793,6 @@
                 </a:solidFill>
                 <a:latin typeface="Segoe UI"/>
               </a:defRPr>
-              <a:lnSpc>
-                <a:spcPct val="114999"/>
-              </a:lnSpc>
             </a:pPr>
             <a:r>
               <a:t>VisionGuard · AI Construction Safety · © 2026</a:t>
@@ -8940,9 +8835,6 @@
                 </a:solidFill>
                 <a:latin typeface="Segoe UI"/>
               </a:defRPr>
-              <a:lnSpc>
-                <a:spcPct val="114999"/>
-              </a:lnSpc>
             </a:pPr>
             <a:r>
               <a:t>🌐 Live Demo: bestaloner.github.io/AIsp  |  📧 contact@visionguard.ai</a:t>
@@ -8959,7 +8851,7 @@
 </file>
 
 <file path=ppt/slides/slide2.xml><?xml version="1.0" encoding="utf-8"?>
-<p:sld xmlns:a="http://schemas.openxmlformats.org/drawingml/2006/main" xmlns:p="http://schemas.openxmlformats.org/presentationml/2006/main" xmlns:r="http://schemas.openxmlformats.org/officeDocument/2006/relationships">
+<p:sld xmlns:a="http://schemas.openxmlformats.org/drawingml/2006/main" xmlns:r="http://schemas.openxmlformats.org/officeDocument/2006/relationships" xmlns:p="http://schemas.openxmlformats.org/presentationml/2006/main">
   <p:cSld>
     <p:spTree>
       <p:nvGrpSpPr>
@@ -8967,7 +8859,14 @@
         <p:cNvGrpSpPr/>
         <p:nvPr/>
       </p:nvGrpSpPr>
-      <p:grpSpPr/>
+      <p:grpSpPr>
+        <a:xfrm>
+          <a:off x="0" y="0"/>
+          <a:ext cx="0" cy="0"/>
+          <a:chOff x="0" y="0"/>
+          <a:chExt cx="0" cy="0"/>
+        </a:xfrm>
+      </p:grpSpPr>
       <p:sp>
         <p:nvSpPr>
           <p:cNvPr id="2" name="Rectangle 1"/>
@@ -9010,6 +8909,7 @@
           <a:lstStyle/>
           <a:p>
             <a:pPr algn="ctr"/>
+            <a:endParaRPr/>
           </a:p>
         </p:txBody>
       </p:sp>
@@ -9055,6 +8955,7 @@
           <a:lstStyle/>
           <a:p>
             <a:pPr algn="ctr"/>
+            <a:endParaRPr/>
           </a:p>
         </p:txBody>
       </p:sp>
@@ -9093,9 +8994,6 @@
                 </a:solidFill>
                 <a:latin typeface="Segoe UI"/>
               </a:defRPr>
-              <a:lnSpc>
-                <a:spcPct val="114999"/>
-              </a:lnSpc>
             </a:pPr>
             <a:r>
               <a:t>🛡</a:t>
@@ -9138,9 +9036,6 @@
                 </a:solidFill>
                 <a:latin typeface="Segoe UI"/>
               </a:defRPr>
-              <a:lnSpc>
-                <a:spcPct val="114999"/>
-              </a:lnSpc>
             </a:pPr>
             <a:r>
               <a:t>VisionGuard</a:t>
@@ -9183,9 +9078,6 @@
                 </a:solidFill>
                 <a:latin typeface="Segoe UI"/>
               </a:defRPr>
-              <a:lnSpc>
-                <a:spcPct val="114999"/>
-              </a:lnSpc>
             </a:pPr>
             <a:r>
               <a:t>AI Construction Safety Inspection Platform · 建筑施工AI安全巡检平台</a:t>
@@ -9235,6 +9127,7 @@
           <a:lstStyle/>
           <a:p>
             <a:pPr algn="ctr"/>
+            <a:endParaRPr/>
           </a:p>
         </p:txBody>
       </p:sp>
@@ -9273,9 +9166,6 @@
                 </a:solidFill>
                 <a:latin typeface="Segoe UI"/>
               </a:defRPr>
-              <a:lnSpc>
-                <a:spcPct val="114999"/>
-              </a:lnSpc>
             </a:pPr>
             <a:r>
               <a:t>HUMAN-AI COLLABORATION</a:t>
@@ -9325,6 +9215,7 @@
           <a:lstStyle/>
           <a:p>
             <a:pPr algn="ctr"/>
+            <a:endParaRPr/>
           </a:p>
         </p:txBody>
       </p:sp>
@@ -9370,6 +9261,7 @@
           <a:lstStyle/>
           <a:p>
             <a:pPr algn="ctr"/>
+            <a:endParaRPr/>
           </a:p>
         </p:txBody>
       </p:sp>
@@ -9408,9 +9300,6 @@
                 </a:solidFill>
                 <a:latin typeface="Segoe UI"/>
               </a:defRPr>
-              <a:lnSpc>
-                <a:spcPct val="114999"/>
-              </a:lnSpc>
             </a:pPr>
             <a:r>
               <a:t>Core Platform Modules / 核心功能模块</a:t>
@@ -9460,6 +9349,7 @@
           <a:lstStyle/>
           <a:p>
             <a:pPr algn="ctr"/>
+            <a:endParaRPr/>
           </a:p>
         </p:txBody>
       </p:sp>
@@ -9502,7 +9392,7 @@
           </a:fontRef>
         </p:style>
         <p:txBody>
-          <a:bodyPr rtlCol="0" anchor="ctr" wrap="square"/>
+          <a:bodyPr wrap="square" rtlCol="0" anchor="ctr"/>
           <a:lstStyle/>
           <a:p>
             <a:pPr algn="ctr">
@@ -9578,9 +9468,6 @@
                 </a:solidFill>
                 <a:latin typeface="Segoe UI"/>
               </a:defRPr>
-              <a:lnSpc>
-                <a:spcPct val="114999"/>
-              </a:lnSpc>
             </a:pPr>
             <a:r>
               <a:t>Executive Dashboard &amp; AI Review Workbench</a:t>
@@ -9623,9 +9510,6 @@
                 </a:solidFill>
                 <a:latin typeface="Segoe UI"/>
               </a:defRPr>
-              <a:lnSpc>
-                <a:spcPct val="114999"/>
-              </a:lnSpc>
             </a:pPr>
             <a:r>
               <a:t>工作台总览 · 人工复核工作台</a:t>
@@ -9668,9 +9552,6 @@
                 </a:solidFill>
                 <a:latin typeface="Segoe UI"/>
               </a:defRPr>
-              <a:lnSpc>
-                <a:spcPct val="114999"/>
-              </a:lnSpc>
             </a:pPr>
             <a:r>
               <a:t>Real-time KPI cards, hazard trend charts, and project status overview. The AI Review Workbench presents original camera images side-by-side with AI-annotated detection results — reviewers confirm or dismiss each finding in seconds. This human-in-the-loop step combines AI speed with expert judgment to eliminate false positives.</a:t>
@@ -9717,7 +9598,7 @@
           </a:fontRef>
         </p:style>
         <p:txBody>
-          <a:bodyPr rtlCol="0" anchor="ctr" wrap="square"/>
+          <a:bodyPr wrap="square" rtlCol="0" anchor="ctr"/>
           <a:lstStyle/>
           <a:p>
             <a:pPr algn="ctr">
@@ -9793,9 +9674,6 @@
                 </a:solidFill>
                 <a:latin typeface="Segoe UI"/>
               </a:defRPr>
-              <a:lnSpc>
-                <a:spcPct val="114999"/>
-              </a:lnSpc>
             </a:pPr>
             <a:r>
               <a:t>Work Order Dispatch &amp; Lifecycle Tracking</a:t>
@@ -9838,9 +9716,6 @@
                 </a:solidFill>
                 <a:latin typeface="Segoe UI"/>
               </a:defRPr>
-              <a:lnSpc>
-                <a:spcPct val="114999"/>
-              </a:lnSpc>
             </a:pPr>
             <a:r>
               <a:t>工单派发 · 工单台账</a:t>
@@ -9883,9 +9758,6 @@
                 </a:solidFill>
                 <a:latin typeface="Segoe UI"/>
               </a:defRPr>
-              <a:lnSpc>
-                <a:spcPct val="114999"/>
-              </a:lnSpc>
             </a:pPr>
             <a:r>
               <a:t>One-click batch dispatch confirmed hazards as work orders to assigned on-site executors. Full lifecycle: Pending → Dispatched → Rectifying → Submitted → Verified → Closed. Every status change is timestamped and logged. Executors see only assigned tasks; admins have full visibility across all projects.</a:t>
@@ -9932,7 +9804,7 @@
           </a:fontRef>
         </p:style>
         <p:txBody>
-          <a:bodyPr rtlCol="0" anchor="ctr" wrap="square"/>
+          <a:bodyPr wrap="square" rtlCol="0" anchor="ctr"/>
           <a:lstStyle/>
           <a:p>
             <a:pPr algn="ctr">
@@ -10008,9 +9880,6 @@
                 </a:solidFill>
                 <a:latin typeface="Segoe UI"/>
               </a:defRPr>
-              <a:lnSpc>
-                <a:spcPct val="114999"/>
-              </a:lnSpc>
             </a:pPr>
             <a:r>
               <a:t>Multi-Site Management &amp; Per-Camera Scene Config</a:t>
@@ -10053,9 +9922,6 @@
                 </a:solidFill>
                 <a:latin typeface="Segoe UI"/>
               </a:defRPr>
-              <a:lnSpc>
-                <a:spcPct val="114999"/>
-              </a:lnSpc>
             </a:pPr>
             <a:r>
               <a:t>项目管理 · 摄像头场景矩阵配置 · 工单设置</a:t>
@@ -10098,9 +9964,6 @@
                 </a:solidFill>
                 <a:latin typeface="Segoe UI"/>
               </a:defRPr>
-              <a:lnSpc>
-                <a:spcPct val="114999"/>
-              </a:lnSpc>
             </a:pPr>
             <a:r>
               <a:t>One platform manages unlimited construction sites. Each camera independently configured with a scene matrix — enable only relevant hazard types per camera's field of view. WO Settings control which hazard categories auto-generate work orders. Project-level executor assignment ensures accountability.</a:t>
@@ -10150,6 +10013,7 @@
           <a:lstStyle/>
           <a:p>
             <a:pPr algn="ctr"/>
+            <a:endParaRPr/>
           </a:p>
         </p:txBody>
       </p:sp>
@@ -10188,9 +10052,6 @@
                 </a:solidFill>
                 <a:latin typeface="Segoe UI"/>
               </a:defRPr>
-              <a:lnSpc>
-                <a:spcPct val="114999"/>
-              </a:lnSpc>
             </a:pPr>
             <a:r>
               <a:t>Role-Based Access / 角色权限</a:t>
@@ -10240,6 +10101,7 @@
           <a:lstStyle/>
           <a:p>
             <a:pPr algn="ctr"/>
+            <a:endParaRPr/>
           </a:p>
         </p:txBody>
       </p:sp>
@@ -10285,6 +10147,7 @@
           <a:lstStyle/>
           <a:p>
             <a:pPr algn="ctr"/>
+            <a:endParaRPr/>
           </a:p>
         </p:txBody>
       </p:sp>
@@ -10330,6 +10193,7 @@
           <a:lstStyle/>
           <a:p>
             <a:pPr algn="ctr"/>
+            <a:endParaRPr/>
           </a:p>
         </p:txBody>
       </p:sp>
@@ -10368,9 +10232,6 @@
                 </a:solidFill>
                 <a:latin typeface="Segoe UI"/>
               </a:defRPr>
-              <a:lnSpc>
-                <a:spcPct val="114999"/>
-              </a:lnSpc>
             </a:pPr>
             <a:r>
               <a:t>👑</a:t>
@@ -10413,9 +10274,6 @@
                 </a:solidFill>
                 <a:latin typeface="Segoe UI"/>
               </a:defRPr>
-              <a:lnSpc>
-                <a:spcPct val="114999"/>
-              </a:lnSpc>
             </a:pPr>
             <a:r>
               <a:t>Administrator</a:t>
@@ -10458,9 +10316,6 @@
                 </a:solidFill>
                 <a:latin typeface="Segoe UI"/>
               </a:defRPr>
-              <a:lnSpc>
-                <a:spcPct val="114999"/>
-              </a:lnSpc>
             </a:pPr>
             <a:r>
               <a:t>系统管理员</a:t>
@@ -10503,9 +10358,6 @@
                 </a:solidFill>
                 <a:latin typeface="Segoe UI"/>
               </a:defRPr>
-              <a:lnSpc>
-                <a:spcPct val="114999"/>
-              </a:lnSpc>
             </a:pPr>
             <a:r>
               <a:t>Full platform access</a:t>
@@ -10559,6 +10411,7 @@
           <a:lstStyle/>
           <a:p>
             <a:pPr algn="ctr"/>
+            <a:endParaRPr/>
           </a:p>
         </p:txBody>
       </p:sp>
@@ -10604,6 +10457,7 @@
           <a:lstStyle/>
           <a:p>
             <a:pPr algn="ctr"/>
+            <a:endParaRPr/>
           </a:p>
         </p:txBody>
       </p:sp>
@@ -10642,9 +10496,6 @@
                 </a:solidFill>
                 <a:latin typeface="Segoe UI"/>
               </a:defRPr>
-              <a:lnSpc>
-                <a:spcPct val="114999"/>
-              </a:lnSpc>
             </a:pPr>
             <a:r>
               <a:t>🔍</a:t>
@@ -10687,9 +10538,6 @@
                 </a:solidFill>
                 <a:latin typeface="Segoe UI"/>
               </a:defRPr>
-              <a:lnSpc>
-                <a:spcPct val="114999"/>
-              </a:lnSpc>
             </a:pPr>
             <a:r>
               <a:t>Reviewer</a:t>
@@ -10732,9 +10580,6 @@
                 </a:solidFill>
                 <a:latin typeface="Segoe UI"/>
               </a:defRPr>
-              <a:lnSpc>
-                <a:spcPct val="114999"/>
-              </a:lnSpc>
             </a:pPr>
             <a:r>
               <a:t>复核员</a:t>
@@ -10777,9 +10622,6 @@
                 </a:solidFill>
                 <a:latin typeface="Segoe UI"/>
               </a:defRPr>
-              <a:lnSpc>
-                <a:spcPct val="114999"/>
-              </a:lnSpc>
             </a:pPr>
             <a:r>
               <a:t>AI review workbench</a:t>
@@ -10833,6 +10675,7 @@
           <a:lstStyle/>
           <a:p>
             <a:pPr algn="ctr"/>
+            <a:endParaRPr/>
           </a:p>
         </p:txBody>
       </p:sp>
@@ -10878,6 +10721,7 @@
           <a:lstStyle/>
           <a:p>
             <a:pPr algn="ctr"/>
+            <a:endParaRPr/>
           </a:p>
         </p:txBody>
       </p:sp>
@@ -10916,9 +10760,6 @@
                 </a:solidFill>
                 <a:latin typeface="Segoe UI"/>
               </a:defRPr>
-              <a:lnSpc>
-                <a:spcPct val="114999"/>
-              </a:lnSpc>
             </a:pPr>
             <a:r>
               <a:t>🔧</a:t>
@@ -10961,9 +10802,6 @@
                 </a:solidFill>
                 <a:latin typeface="Segoe UI"/>
               </a:defRPr>
-              <a:lnSpc>
-                <a:spcPct val="114999"/>
-              </a:lnSpc>
             </a:pPr>
             <a:r>
               <a:t>Executor</a:t>
@@ -11006,9 +10844,6 @@
                 </a:solidFill>
                 <a:latin typeface="Segoe UI"/>
               </a:defRPr>
-              <a:lnSpc>
-                <a:spcPct val="114999"/>
-              </a:lnSpc>
             </a:pPr>
             <a:r>
               <a:t>执行人</a:t>
@@ -11051,9 +10886,6 @@
                 </a:solidFill>
                 <a:latin typeface="Segoe UI"/>
               </a:defRPr>
-              <a:lnSpc>
-                <a:spcPct val="114999"/>
-              </a:lnSpc>
             </a:pPr>
             <a:r>
               <a:t>Receives assigned WOs</a:t>
@@ -11107,6 +10939,7 @@
           <a:lstStyle/>
           <a:p>
             <a:pPr algn="ctr"/>
+            <a:endParaRPr/>
           </a:p>
         </p:txBody>
       </p:sp>
@@ -11152,6 +10985,7 @@
           <a:lstStyle/>
           <a:p>
             <a:pPr algn="ctr"/>
+            <a:endParaRPr/>
           </a:p>
         </p:txBody>
       </p:sp>
@@ -11190,9 +11024,6 @@
                 </a:solidFill>
                 <a:latin typeface="Segoe UI"/>
               </a:defRPr>
-              <a:lnSpc>
-                <a:spcPct val="114999"/>
-              </a:lnSpc>
             </a:pPr>
             <a:r>
               <a:t>👀</a:t>
@@ -11235,9 +11066,6 @@
                 </a:solidFill>
                 <a:latin typeface="Segoe UI"/>
               </a:defRPr>
-              <a:lnSpc>
-                <a:spcPct val="114999"/>
-              </a:lnSpc>
             </a:pPr>
             <a:r>
               <a:t>Viewer</a:t>
@@ -11280,9 +11108,6 @@
                 </a:solidFill>
                 <a:latin typeface="Segoe UI"/>
               </a:defRPr>
-              <a:lnSpc>
-                <a:spcPct val="114999"/>
-              </a:lnSpc>
             </a:pPr>
             <a:r>
               <a:t>观察员</a:t>
@@ -11325,9 +11150,6 @@
                 </a:solidFill>
                 <a:latin typeface="Segoe UI"/>
               </a:defRPr>
-              <a:lnSpc>
-                <a:spcPct val="114999"/>
-              </a:lnSpc>
             </a:pPr>
             <a:r>
               <a:t>Read-only access</a:t>
@@ -11381,6 +11203,7 @@
           <a:lstStyle/>
           <a:p>
             <a:pPr algn="ctr"/>
+            <a:endParaRPr/>
           </a:p>
         </p:txBody>
       </p:sp>
@@ -11419,9 +11242,6 @@
                 </a:solidFill>
                 <a:latin typeface="Segoe UI"/>
               </a:defRPr>
-              <a:lnSpc>
-                <a:spcPct val="114999"/>
-              </a:lnSpc>
             </a:pPr>
             <a:r>
               <a:t>Why VisionGuard / 核心优势</a:t>
@@ -11471,6 +11291,7 @@
           <a:lstStyle/>
           <a:p>
             <a:pPr algn="ctr"/>
+            <a:endParaRPr/>
           </a:p>
         </p:txBody>
       </p:sp>
@@ -11516,6 +11337,7 @@
           <a:lstStyle/>
           <a:p>
             <a:pPr algn="ctr"/>
+            <a:endParaRPr/>
           </a:p>
         </p:txBody>
       </p:sp>
@@ -11554,9 +11376,6 @@
                 </a:solidFill>
                 <a:latin typeface="Segoe UI"/>
               </a:defRPr>
-              <a:lnSpc>
-                <a:spcPct val="114999"/>
-              </a:lnSpc>
             </a:pPr>
             <a:r>
               <a:t>✓</a:t>
@@ -11599,9 +11418,6 @@
                 </a:solidFill>
                 <a:latin typeface="Segoe UI"/>
               </a:defRPr>
-              <a:lnSpc>
-                <a:spcPct val="114999"/>
-              </a:lnSpc>
             </a:pPr>
             <a:r>
               <a:t>Dual AI Engine / 双AI引擎</a:t>
@@ -11644,9 +11460,6 @@
                 </a:solidFill>
                 <a:latin typeface="Segoe UI"/>
               </a:defRPr>
-              <a:lnSpc>
-                <a:spcPct val="114999"/>
-              </a:lnSpc>
             </a:pPr>
             <a:r>
               <a:t>YOLO real-time detection + VLM secondary verification — high recall, low false positives</a:t>
@@ -11696,6 +11509,7 @@
           <a:lstStyle/>
           <a:p>
             <a:pPr algn="ctr"/>
+            <a:endParaRPr/>
           </a:p>
         </p:txBody>
       </p:sp>
@@ -11734,9 +11548,6 @@
                 </a:solidFill>
                 <a:latin typeface="Segoe UI"/>
               </a:defRPr>
-              <a:lnSpc>
-                <a:spcPct val="114999"/>
-              </a:lnSpc>
             </a:pPr>
             <a:r>
               <a:t>✓</a:t>
@@ -11779,9 +11590,6 @@
                 </a:solidFill>
                 <a:latin typeface="Segoe UI"/>
               </a:defRPr>
-              <a:lnSpc>
-                <a:spcPct val="114999"/>
-              </a:lnSpc>
             </a:pPr>
             <a:r>
               <a:t>Human-in-the-Loop / 人机协同</a:t>
@@ -11824,9 +11632,6 @@
                 </a:solidFill>
                 <a:latin typeface="Segoe UI"/>
               </a:defRPr>
-              <a:lnSpc>
-                <a:spcPct val="114999"/>
-              </a:lnSpc>
             </a:pPr>
             <a:r>
               <a:t>AI flags, humans decide — combining machine speed with expert judgment for unmatched accuracy</a:t>
@@ -11876,6 +11681,7 @@
           <a:lstStyle/>
           <a:p>
             <a:pPr algn="ctr"/>
+            <a:endParaRPr/>
           </a:p>
         </p:txBody>
       </p:sp>
@@ -11914,9 +11720,6 @@
                 </a:solidFill>
                 <a:latin typeface="Segoe UI"/>
               </a:defRPr>
-              <a:lnSpc>
-                <a:spcPct val="114999"/>
-              </a:lnSpc>
             </a:pPr>
             <a:r>
               <a:t>✓</a:t>
@@ -11959,9 +11762,6 @@
                 </a:solidFill>
                 <a:latin typeface="Segoe UI"/>
               </a:defRPr>
-              <a:lnSpc>
-                <a:spcPct val="114999"/>
-              </a:lnSpc>
             </a:pPr>
             <a:r>
               <a:t>Full Lifecycle Traceability / 全链路可追溯</a:t>
@@ -12004,9 +11804,6 @@
                 </a:solidFill>
                 <a:latin typeface="Segoe UI"/>
               </a:defRPr>
-              <a:lnSpc>
-                <a:spcPct val="114999"/>
-              </a:lnSpc>
             </a:pPr>
             <a:r>
               <a:t>Every hazard has a complete audit trail from AI detection to rectification closure — compliance ready</a:t>
@@ -12056,6 +11853,7 @@
           <a:lstStyle/>
           <a:p>
             <a:pPr algn="ctr"/>
+            <a:endParaRPr/>
           </a:p>
         </p:txBody>
       </p:sp>
@@ -12094,9 +11892,6 @@
                 </a:solidFill>
                 <a:latin typeface="Segoe UI"/>
               </a:defRPr>
-              <a:lnSpc>
-                <a:spcPct val="114999"/>
-              </a:lnSpc>
             </a:pPr>
             <a:r>
               <a:t>✓</a:t>
@@ -12139,9 +11934,6 @@
                 </a:solidFill>
                 <a:latin typeface="Segoe UI"/>
               </a:defRPr>
-              <a:lnSpc>
-                <a:spcPct val="114999"/>
-              </a:lnSpc>
             </a:pPr>
             <a:r>
               <a:t>Enterprise Multi-Site Scale / 企业级多项目</a:t>
@@ -12184,9 +11976,6 @@
                 </a:solidFill>
                 <a:latin typeface="Segoe UI"/>
               </a:defRPr>
-              <a:lnSpc>
-                <a:spcPct val="114999"/>
-              </a:lnSpc>
             </a:pPr>
             <a:r>
               <a:t>One platform manages all sites, cameras, and teams — scales from single site to enterprise portfolio</a:t>
@@ -12236,6 +12025,7 @@
           <a:lstStyle/>
           <a:p>
             <a:pPr algn="ctr"/>
+            <a:endParaRPr/>
           </a:p>
         </p:txBody>
       </p:sp>
@@ -12274,13 +12064,16 @@
                 </a:solidFill>
                 <a:latin typeface="Segoe UI"/>
               </a:defRPr>
-              <a:lnSpc>
-                <a:spcPct val="114999"/>
-              </a:lnSpc>
-            </a:pPr>
-            <a:r>
-              <a:t>Technology Stack / 技术栈</a:t>
-            </a:r>
+            </a:pPr>
+            <a:r>
+              <a:rPr dirty="0"/>
+              <a:t>Technology Stack / </a:t>
+            </a:r>
+            <a:r>
+              <a:rPr dirty="0" err="1"/>
+              <a:t>技术栈</a:t>
+            </a:r>
+            <a:endParaRPr dirty="0"/>
           </a:p>
         </p:txBody>
       </p:sp>
@@ -12326,6 +12119,7 @@
           <a:lstStyle/>
           <a:p>
             <a:pPr algn="ctr"/>
+            <a:endParaRPr/>
           </a:p>
         </p:txBody>
       </p:sp>
@@ -12371,6 +12165,7 @@
           <a:lstStyle/>
           <a:p>
             <a:pPr algn="ctr"/>
+            <a:endParaRPr/>
           </a:p>
         </p:txBody>
       </p:sp>
@@ -12409,9 +12204,6 @@
                 </a:solidFill>
                 <a:latin typeface="Segoe UI"/>
               </a:defRPr>
-              <a:lnSpc>
-                <a:spcPct val="114999"/>
-              </a:lnSpc>
             </a:pPr>
             <a:r>
               <a:t>🎯 YOLO</a:t>
@@ -12454,9 +12246,6 @@
                 </a:solidFill>
                 <a:latin typeface="Segoe UI"/>
               </a:defRPr>
-              <a:lnSpc>
-                <a:spcPct val="114999"/>
-              </a:lnSpc>
             </a:pPr>
             <a:r>
               <a:t>Real-time Object Detection</a:t>
@@ -12506,6 +12295,7 @@
           <a:lstStyle/>
           <a:p>
             <a:pPr algn="ctr"/>
+            <a:endParaRPr/>
           </a:p>
         </p:txBody>
       </p:sp>
@@ -12544,9 +12334,6 @@
                 </a:solidFill>
                 <a:latin typeface="Segoe UI"/>
               </a:defRPr>
-              <a:lnSpc>
-                <a:spcPct val="114999"/>
-              </a:lnSpc>
             </a:pPr>
             <a:r>
               <a:t>🧠 VLM</a:t>
@@ -12589,9 +12376,6 @@
                 </a:solidFill>
                 <a:latin typeface="Segoe UI"/>
               </a:defRPr>
-              <a:lnSpc>
-                <a:spcPct val="114999"/>
-              </a:lnSpc>
             </a:pPr>
             <a:r>
               <a:t>Vision Language Model (Qwen)</a:t>
@@ -12641,6 +12425,7 @@
           <a:lstStyle/>
           <a:p>
             <a:pPr algn="ctr"/>
+            <a:endParaRPr/>
           </a:p>
         </p:txBody>
       </p:sp>
@@ -12679,9 +12464,6 @@
                 </a:solidFill>
                 <a:latin typeface="Segoe UI"/>
               </a:defRPr>
-              <a:lnSpc>
-                <a:spcPct val="114999"/>
-              </a:lnSpc>
             </a:pPr>
             <a:r>
               <a:t>⚡ vLLM</a:t>
@@ -12724,9 +12506,6 @@
                 </a:solidFill>
                 <a:latin typeface="Segoe UI"/>
               </a:defRPr>
-              <a:lnSpc>
-                <a:spcPct val="114999"/>
-              </a:lnSpc>
             </a:pPr>
             <a:r>
               <a:t>High-Throughput Inference</a:t>
@@ -12776,6 +12555,7 @@
           <a:lstStyle/>
           <a:p>
             <a:pPr algn="ctr"/>
+            <a:endParaRPr/>
           </a:p>
         </p:txBody>
       </p:sp>
@@ -12814,9 +12594,6 @@
                 </a:solidFill>
                 <a:latin typeface="Segoe UI"/>
               </a:defRPr>
-              <a:lnSpc>
-                <a:spcPct val="114999"/>
-              </a:lnSpc>
             </a:pPr>
             <a:r>
               <a:t>🔗 REST API</a:t>
@@ -12859,9 +12636,6 @@
                 </a:solidFill>
                 <a:latin typeface="Segoe UI"/>
               </a:defRPr>
-              <a:lnSpc>
-                <a:spcPct val="114999"/>
-              </a:lnSpc>
             </a:pPr>
             <a:r>
               <a:t>Upstream Integration</a:t>
@@ -12904,9 +12678,6 @@
                 </a:solidFill>
                 <a:latin typeface="Segoe UI"/>
               </a:defRPr>
-              <a:lnSpc>
-                <a:spcPct val="114999"/>
-              </a:lnSpc>
             </a:pPr>
             <a:r>
               <a:t>📸 Cameras → 🎯 YOLO → 🧠 VLM → 👁 Human Review → 📋 Work Order → 🔧 Rectify → ✅ Verify → 📤 Upstream API</a:t>
@@ -12949,9 +12720,6 @@
                 </a:solidFill>
                 <a:latin typeface="Segoe UI"/>
               </a:defRPr>
-              <a:lnSpc>
-                <a:spcPct val="114999"/>
-              </a:lnSpc>
             </a:pPr>
             <a:r>
               <a:t>指数退避重试 + 死信队列确保数据零丢失  ·  Exponential backoff retry + dead-letter queue for zero data loss</a:t>
@@ -13001,6 +12769,7 @@
           <a:lstStyle/>
           <a:p>
             <a:pPr algn="ctr"/>
+            <a:endParaRPr/>
           </a:p>
         </p:txBody>
       </p:sp>
@@ -13039,9 +12808,6 @@
                 </a:solidFill>
                 <a:latin typeface="Segoe UI"/>
               </a:defRPr>
-              <a:lnSpc>
-                <a:spcPct val="114999"/>
-              </a:lnSpc>
             </a:pPr>
             <a:r>
               <a:t>Application Scenario / 应用场景</a:t>
@@ -13091,6 +12857,7 @@
           <a:lstStyle/>
           <a:p>
             <a:pPr algn="ctr"/>
+            <a:endParaRPr/>
           </a:p>
         </p:txBody>
       </p:sp>
@@ -13102,8 +12869,8 @@
         </p:nvSpPr>
         <p:spPr>
           <a:xfrm>
-            <a:off x="4140000" y="5670000"/>
-            <a:ext cx="3060000" cy="756000"/>
+            <a:off x="4140000" y="5669999"/>
+            <a:ext cx="3060000" cy="1677601"/>
           </a:xfrm>
           <a:prstGeom prst="roundRect">
             <a:avLst/>
@@ -13136,6 +12903,7 @@
           <a:lstStyle/>
           <a:p>
             <a:pPr algn="ctr"/>
+            <a:endParaRPr/>
           </a:p>
         </p:txBody>
       </p:sp>
@@ -13148,7 +12916,7 @@
         <p:spPr>
           <a:xfrm>
             <a:off x="4248000" y="5724000"/>
-            <a:ext cx="1260000" cy="648000"/>
+            <a:ext cx="1260000" cy="1423560"/>
           </a:xfrm>
           <a:prstGeom prst="rect">
             <a:avLst/>
@@ -13178,7 +12946,7 @@
           </a:fontRef>
         </p:style>
         <p:txBody>
-          <a:bodyPr rtlCol="0" anchor="ctr" wrap="square"/>
+          <a:bodyPr wrap="square" rtlCol="0" anchor="ctr"/>
           <a:lstStyle/>
           <a:p>
             <a:pPr algn="ctr">
@@ -13188,6 +12956,7 @@
               <a:defRPr sz="1600"/>
             </a:pPr>
             <a:r>
+              <a:rPr dirty="0"/>
               <a:t>🖼</a:t>
             </a:r>
           </a:p>
@@ -13201,6 +12970,7 @@
               </a:defRPr>
             </a:pPr>
             <a:r>
+              <a:rPr dirty="0"/>
               <a:t>Site Overview</a:t>
             </a:r>
           </a:p>
@@ -13214,8 +12984,10 @@
               </a:defRPr>
             </a:pPr>
             <a:r>
+              <a:rPr dirty="0" err="1"/>
               <a:t>工地全景示意</a:t>
             </a:r>
+            <a:endParaRPr dirty="0"/>
           </a:p>
         </p:txBody>
       </p:sp>
@@ -13254,9 +13026,6 @@
                 </a:solidFill>
                 <a:latin typeface="Segoe UI"/>
               </a:defRPr>
-              <a:lnSpc>
-                <a:spcPct val="114999"/>
-              </a:lnSpc>
             </a:pPr>
             <a:r>
               <a:t>Typical Deployment / 典型部署</a:t>
@@ -13299,9 +13068,6 @@
                 </a:solidFill>
                 <a:latin typeface="Segoe UI"/>
               </a:defRPr>
-              <a:lnSpc>
-                <a:spcPct val="114999"/>
-              </a:lnSpc>
             </a:pPr>
             <a:r>
               <a:t>A mid-size construction site deploys 8–20 cameras covering entrances, edges, lifting zones, material yards, and access roads. VisionGuard monitors all feeds simultaneously — impossible for human guards to match. When a hazard is detected, the system alerts reviewers within seconds and dispatches work orders to on-site executors.</a:t>
@@ -13356,6 +13122,7 @@
           <a:lstStyle/>
           <a:p>
             <a:pPr algn="ctr"/>
+            <a:endParaRPr/>
           </a:p>
         </p:txBody>
       </p:sp>
@@ -13394,9 +13161,6 @@
                 </a:solidFill>
                 <a:latin typeface="Segoe UI"/>
               </a:defRPr>
-              <a:lnSpc>
-                <a:spcPct val="114999"/>
-              </a:lnSpc>
             </a:pPr>
             <a:r>
               <a:t>VisionGuard · AI Construction Safety · © 2026</a:t>
@@ -13439,9 +13203,6 @@
                 </a:solidFill>
                 <a:latin typeface="Segoe UI"/>
               </a:defRPr>
-              <a:lnSpc>
-                <a:spcPct val="114999"/>
-              </a:lnSpc>
             </a:pPr>
             <a:r>
               <a:t>🌐 Live Demo: bestaloner.github.io/AIsp  |  📧 contact@visionguard.ai</a:t>
